--- a/資料作成テンプレート_A4横.pptx
+++ b/資料作成テンプレート_A4横.pptx
@@ -5,7 +5,7 @@
     <p:sldMasterId id="2147483660" r:id="rId1"/>
   </p:sldMasterIdLst>
   <p:notesMasterIdLst>
-    <p:notesMasterId r:id="rId12"/>
+    <p:notesMasterId r:id="rId14"/>
   </p:notesMasterIdLst>
   <p:sldIdLst>
     <p:sldId id="267" r:id="rId2"/>
@@ -18,6 +18,8 @@
     <p:sldId id="262" r:id="rId9"/>
     <p:sldId id="263" r:id="rId10"/>
     <p:sldId id="265" r:id="rId11"/>
+    <p:sldId id="268" r:id="rId12"/>
+    <p:sldId id="269" r:id="rId13"/>
   </p:sldIdLst>
   <p:sldSz cx="10691813" cy="7559675"/>
   <p:notesSz cx="6858000" cy="9144000"/>
@@ -124,6 +126,1885 @@
 </p:presentation>
 </file>
 
+<file path=ppt/charts/chart1.xml><?xml version="1.0" encoding="utf-8"?>
+<c:chartSpace xmlns:c="http://schemas.openxmlformats.org/drawingml/2006/chart" xmlns:a="http://schemas.openxmlformats.org/drawingml/2006/main" xmlns:r="http://schemas.openxmlformats.org/officeDocument/2006/relationships" xmlns:c16r2="http://schemas.microsoft.com/office/drawing/2015/06/chart">
+  <c:date1904 val="0"/>
+  <c:lang val="ja-JP"/>
+  <c:roundedCorners val="0"/>
+  <mc:AlternateContent xmlns:mc="http://schemas.openxmlformats.org/markup-compatibility/2006">
+    <mc:Choice xmlns:c14="http://schemas.microsoft.com/office/drawing/2007/8/2/chart" Requires="c14">
+      <c14:style val="102"/>
+    </mc:Choice>
+    <mc:Fallback>
+      <c:style val="2"/>
+    </mc:Fallback>
+  </mc:AlternateContent>
+  <c:chart>
+    <c:title>
+      <c:tx>
+        <c:rich>
+          <a:bodyPr rot="0" spcFirstLastPara="1" vertOverflow="ellipsis" vert="horz" wrap="square" anchor="ctr" anchorCtr="1"/>
+          <a:lstStyle/>
+          <a:p>
+            <a:pPr>
+              <a:defRPr sz="1862" b="0" i="0" u="none" strike="noStrike" kern="1200" spc="0" baseline="0">
+                <a:solidFill>
+                  <a:schemeClr val="tx1">
+                    <a:lumMod val="65000"/>
+                    <a:lumOff val="35000"/>
+                  </a:schemeClr>
+                </a:solidFill>
+                <a:latin typeface="+mn-lt"/>
+                <a:ea typeface="+mn-ea"/>
+                <a:cs typeface="+mn-cs"/>
+              </a:defRPr>
+            </a:pPr>
+            <a:r>
+              <a:rPr lang="ja-JP" altLang="en-US" b="1" i="0">
+                <a:latin typeface="Meiryo" panose="020B0604030504040204" pitchFamily="34" charset="-128"/>
+                <a:ea typeface="Meiryo" panose="020B0604030504040204" pitchFamily="34" charset="-128"/>
+              </a:rPr>
+              <a:t>グラフタイトル</a:t>
+            </a:r>
+            <a:endParaRPr lang="en-US" altLang="ja-JP" b="1" i="0" dirty="0">
+              <a:latin typeface="Meiryo" panose="020B0604030504040204" pitchFamily="34" charset="-128"/>
+              <a:ea typeface="Meiryo" panose="020B0604030504040204" pitchFamily="34" charset="-128"/>
+            </a:endParaRPr>
+          </a:p>
+        </c:rich>
+      </c:tx>
+      <c:overlay val="0"/>
+      <c:spPr>
+        <a:noFill/>
+        <a:ln>
+          <a:noFill/>
+        </a:ln>
+        <a:effectLst/>
+      </c:spPr>
+      <c:txPr>
+        <a:bodyPr rot="0" spcFirstLastPara="1" vertOverflow="ellipsis" vert="horz" wrap="square" anchor="ctr" anchorCtr="1"/>
+        <a:lstStyle/>
+        <a:p>
+          <a:pPr>
+            <a:defRPr sz="1862" b="0" i="0" u="none" strike="noStrike" kern="1200" spc="0" baseline="0">
+              <a:solidFill>
+                <a:schemeClr val="tx1">
+                  <a:lumMod val="65000"/>
+                  <a:lumOff val="35000"/>
+                </a:schemeClr>
+              </a:solidFill>
+              <a:latin typeface="+mn-lt"/>
+              <a:ea typeface="+mn-ea"/>
+              <a:cs typeface="+mn-cs"/>
+            </a:defRPr>
+          </a:pPr>
+          <a:endParaRPr lang="ja-JP"/>
+        </a:p>
+      </c:txPr>
+    </c:title>
+    <c:autoTitleDeleted val="0"/>
+    <c:plotArea>
+      <c:layout/>
+      <c:barChart>
+        <c:barDir val="col"/>
+        <c:grouping val="stacked"/>
+        <c:varyColors val="0"/>
+        <c:ser>
+          <c:idx val="0"/>
+          <c:order val="0"/>
+          <c:tx>
+            <c:strRef>
+              <c:f>Sheet1!$B$1</c:f>
+              <c:strCache>
+                <c:ptCount val="1"/>
+                <c:pt idx="0">
+                  <c:v>系列 1</c:v>
+                </c:pt>
+              </c:strCache>
+            </c:strRef>
+          </c:tx>
+          <c:spPr>
+            <a:solidFill>
+              <a:schemeClr val="accent1"/>
+            </a:solidFill>
+            <a:ln>
+              <a:noFill/>
+            </a:ln>
+            <a:effectLst/>
+          </c:spPr>
+          <c:invertIfNegative val="0"/>
+          <c:dPt>
+            <c:idx val="0"/>
+            <c:invertIfNegative val="0"/>
+            <c:bubble3D val="0"/>
+            <c:spPr>
+              <a:solidFill>
+                <a:srgbClr val="C00000"/>
+              </a:solidFill>
+              <a:ln>
+                <a:noFill/>
+              </a:ln>
+              <a:effectLst/>
+            </c:spPr>
+            <c:extLst>
+              <c:ext xmlns:c16="http://schemas.microsoft.com/office/drawing/2014/chart" uri="{C3380CC4-5D6E-409C-BE32-E72D297353CC}">
+                <c16:uniqueId val="{00000003-DC49-C540-8C8E-3BA13D35B00A}"/>
+              </c:ext>
+            </c:extLst>
+          </c:dPt>
+          <c:dPt>
+            <c:idx val="1"/>
+            <c:invertIfNegative val="0"/>
+            <c:bubble3D val="0"/>
+            <c:spPr>
+              <a:solidFill>
+                <a:srgbClr val="C00000"/>
+              </a:solidFill>
+              <a:ln>
+                <a:noFill/>
+              </a:ln>
+              <a:effectLst/>
+            </c:spPr>
+            <c:extLst>
+              <c:ext xmlns:c16="http://schemas.microsoft.com/office/drawing/2014/chart" uri="{C3380CC4-5D6E-409C-BE32-E72D297353CC}">
+                <c16:uniqueId val="{00000004-DC49-C540-8C8E-3BA13D35B00A}"/>
+              </c:ext>
+            </c:extLst>
+          </c:dPt>
+          <c:dPt>
+            <c:idx val="2"/>
+            <c:invertIfNegative val="0"/>
+            <c:bubble3D val="0"/>
+            <c:spPr>
+              <a:solidFill>
+                <a:srgbClr val="C00000"/>
+              </a:solidFill>
+              <a:ln>
+                <a:noFill/>
+              </a:ln>
+              <a:effectLst/>
+            </c:spPr>
+            <c:extLst>
+              <c:ext xmlns:c16="http://schemas.microsoft.com/office/drawing/2014/chart" uri="{C3380CC4-5D6E-409C-BE32-E72D297353CC}">
+                <c16:uniqueId val="{00000005-DC49-C540-8C8E-3BA13D35B00A}"/>
+              </c:ext>
+            </c:extLst>
+          </c:dPt>
+          <c:dPt>
+            <c:idx val="3"/>
+            <c:invertIfNegative val="0"/>
+            <c:bubble3D val="0"/>
+            <c:spPr>
+              <a:solidFill>
+                <a:srgbClr val="C00000"/>
+              </a:solidFill>
+              <a:ln>
+                <a:noFill/>
+              </a:ln>
+              <a:effectLst/>
+            </c:spPr>
+            <c:extLst>
+              <c:ext xmlns:c16="http://schemas.microsoft.com/office/drawing/2014/chart" uri="{C3380CC4-5D6E-409C-BE32-E72D297353CC}">
+                <c16:uniqueId val="{00000006-DC49-C540-8C8E-3BA13D35B00A}"/>
+              </c:ext>
+            </c:extLst>
+          </c:dPt>
+          <c:cat>
+            <c:strRef>
+              <c:f>Sheet1!$A$2:$A$5</c:f>
+              <c:strCache>
+                <c:ptCount val="4"/>
+                <c:pt idx="0">
+                  <c:v>カテゴリ 1</c:v>
+                </c:pt>
+                <c:pt idx="1">
+                  <c:v>カテゴリ 2</c:v>
+                </c:pt>
+                <c:pt idx="2">
+                  <c:v>カテゴリ 3</c:v>
+                </c:pt>
+                <c:pt idx="3">
+                  <c:v>カテゴリ 4</c:v>
+                </c:pt>
+              </c:strCache>
+            </c:strRef>
+          </c:cat>
+          <c:val>
+            <c:numRef>
+              <c:f>Sheet1!$B$2:$B$5</c:f>
+              <c:numCache>
+                <c:formatCode>General</c:formatCode>
+                <c:ptCount val="4"/>
+                <c:pt idx="0">
+                  <c:v>4.3</c:v>
+                </c:pt>
+                <c:pt idx="1">
+                  <c:v>2.5</c:v>
+                </c:pt>
+                <c:pt idx="2">
+                  <c:v>3.5</c:v>
+                </c:pt>
+                <c:pt idx="3">
+                  <c:v>4.5</c:v>
+                </c:pt>
+              </c:numCache>
+            </c:numRef>
+          </c:val>
+          <c:extLst>
+            <c:ext xmlns:c16="http://schemas.microsoft.com/office/drawing/2014/chart" uri="{C3380CC4-5D6E-409C-BE32-E72D297353CC}">
+              <c16:uniqueId val="{00000000-DC49-C540-8C8E-3BA13D35B00A}"/>
+            </c:ext>
+          </c:extLst>
+        </c:ser>
+        <c:dLbls>
+          <c:showLegendKey val="0"/>
+          <c:showVal val="0"/>
+          <c:showCatName val="0"/>
+          <c:showSerName val="0"/>
+          <c:showPercent val="0"/>
+          <c:showBubbleSize val="0"/>
+        </c:dLbls>
+        <c:gapWidth val="219"/>
+        <c:overlap val="100"/>
+        <c:axId val="271478144"/>
+        <c:axId val="271467840"/>
+      </c:barChart>
+      <c:catAx>
+        <c:axId val="271478144"/>
+        <c:scaling>
+          <c:orientation val="minMax"/>
+        </c:scaling>
+        <c:delete val="0"/>
+        <c:axPos val="b"/>
+        <c:numFmt formatCode="General" sourceLinked="1"/>
+        <c:majorTickMark val="none"/>
+        <c:minorTickMark val="none"/>
+        <c:tickLblPos val="nextTo"/>
+        <c:spPr>
+          <a:noFill/>
+          <a:ln w="9525" cap="flat" cmpd="sng" algn="ctr">
+            <a:solidFill>
+              <a:schemeClr val="tx1">
+                <a:lumMod val="15000"/>
+                <a:lumOff val="85000"/>
+              </a:schemeClr>
+            </a:solidFill>
+            <a:round/>
+          </a:ln>
+          <a:effectLst/>
+        </c:spPr>
+        <c:txPr>
+          <a:bodyPr rot="-60000000" spcFirstLastPara="1" vertOverflow="ellipsis" vert="horz" wrap="square" anchor="ctr" anchorCtr="1"/>
+          <a:lstStyle/>
+          <a:p>
+            <a:pPr>
+              <a:defRPr sz="1197" b="0" i="0" u="none" strike="noStrike" kern="1200" baseline="0">
+                <a:solidFill>
+                  <a:schemeClr val="tx1">
+                    <a:lumMod val="65000"/>
+                    <a:lumOff val="35000"/>
+                  </a:schemeClr>
+                </a:solidFill>
+                <a:latin typeface="+mn-lt"/>
+                <a:ea typeface="+mn-ea"/>
+                <a:cs typeface="+mn-cs"/>
+              </a:defRPr>
+            </a:pPr>
+            <a:endParaRPr lang="ja-JP"/>
+          </a:p>
+        </c:txPr>
+        <c:crossAx val="271467840"/>
+        <c:crosses val="autoZero"/>
+        <c:auto val="1"/>
+        <c:lblAlgn val="ctr"/>
+        <c:lblOffset val="100"/>
+        <c:noMultiLvlLbl val="0"/>
+      </c:catAx>
+      <c:valAx>
+        <c:axId val="271467840"/>
+        <c:scaling>
+          <c:orientation val="minMax"/>
+        </c:scaling>
+        <c:delete val="0"/>
+        <c:axPos val="l"/>
+        <c:majorGridlines>
+          <c:spPr>
+            <a:ln w="9525" cap="flat" cmpd="sng" algn="ctr">
+              <a:solidFill>
+                <a:schemeClr val="tx1">
+                  <a:lumMod val="15000"/>
+                  <a:lumOff val="85000"/>
+                </a:schemeClr>
+              </a:solidFill>
+              <a:round/>
+            </a:ln>
+            <a:effectLst/>
+          </c:spPr>
+        </c:majorGridlines>
+        <c:numFmt formatCode="General" sourceLinked="1"/>
+        <c:majorTickMark val="none"/>
+        <c:minorTickMark val="none"/>
+        <c:tickLblPos val="nextTo"/>
+        <c:spPr>
+          <a:noFill/>
+          <a:ln>
+            <a:noFill/>
+          </a:ln>
+          <a:effectLst/>
+        </c:spPr>
+        <c:txPr>
+          <a:bodyPr rot="-60000000" spcFirstLastPara="1" vertOverflow="ellipsis" vert="horz" wrap="square" anchor="ctr" anchorCtr="1"/>
+          <a:lstStyle/>
+          <a:p>
+            <a:pPr>
+              <a:defRPr sz="1197" b="0" i="0" u="none" strike="noStrike" kern="1200" baseline="0">
+                <a:solidFill>
+                  <a:schemeClr val="tx1">
+                    <a:lumMod val="65000"/>
+                    <a:lumOff val="35000"/>
+                  </a:schemeClr>
+                </a:solidFill>
+                <a:latin typeface="+mn-lt"/>
+                <a:ea typeface="+mn-ea"/>
+                <a:cs typeface="+mn-cs"/>
+              </a:defRPr>
+            </a:pPr>
+            <a:endParaRPr lang="ja-JP"/>
+          </a:p>
+        </c:txPr>
+        <c:crossAx val="271478144"/>
+        <c:crosses val="autoZero"/>
+        <c:crossBetween val="between"/>
+      </c:valAx>
+      <c:spPr>
+        <a:noFill/>
+        <a:ln>
+          <a:noFill/>
+        </a:ln>
+        <a:effectLst/>
+      </c:spPr>
+    </c:plotArea>
+    <c:plotVisOnly val="1"/>
+    <c:dispBlanksAs val="gap"/>
+    <c:showDLblsOverMax val="0"/>
+    <c:extLst>
+      <c:ext xmlns:c16r3="http://schemas.microsoft.com/office/drawing/2017/03/chart" uri="{56B9EC1D-385E-4148-901F-78D8002777C0}">
+        <c16r3:dataDisplayOptions16>
+          <c16r3:dispNaAsBlank val="1"/>
+        </c16r3:dataDisplayOptions16>
+      </c:ext>
+    </c:extLst>
+  </c:chart>
+  <c:spPr>
+    <a:noFill/>
+    <a:ln>
+      <a:noFill/>
+    </a:ln>
+    <a:effectLst/>
+  </c:spPr>
+  <c:txPr>
+    <a:bodyPr/>
+    <a:lstStyle/>
+    <a:p>
+      <a:pPr>
+        <a:defRPr/>
+      </a:pPr>
+      <a:endParaRPr lang="ja-JP"/>
+    </a:p>
+  </c:txPr>
+  <c:externalData r:id="rId3">
+    <c:autoUpdate val="0"/>
+  </c:externalData>
+</c:chartSpace>
+</file>
+
+<file path=ppt/charts/chart2.xml><?xml version="1.0" encoding="utf-8"?>
+<c:chartSpace xmlns:c="http://schemas.openxmlformats.org/drawingml/2006/chart" xmlns:a="http://schemas.openxmlformats.org/drawingml/2006/main" xmlns:r="http://schemas.openxmlformats.org/officeDocument/2006/relationships" xmlns:c16r2="http://schemas.microsoft.com/office/drawing/2015/06/chart">
+  <c:date1904 val="0"/>
+  <c:lang val="ja-JP"/>
+  <c:roundedCorners val="0"/>
+  <mc:AlternateContent xmlns:mc="http://schemas.openxmlformats.org/markup-compatibility/2006">
+    <mc:Choice xmlns:c14="http://schemas.microsoft.com/office/drawing/2007/8/2/chart" Requires="c14">
+      <c14:style val="102"/>
+    </mc:Choice>
+    <mc:Fallback>
+      <c:style val="2"/>
+    </mc:Fallback>
+  </mc:AlternateContent>
+  <c:chart>
+    <c:title>
+      <c:tx>
+        <c:rich>
+          <a:bodyPr rot="0" spcFirstLastPara="1" vertOverflow="ellipsis" vert="horz" wrap="square" anchor="ctr" anchorCtr="1"/>
+          <a:lstStyle/>
+          <a:p>
+            <a:pPr>
+              <a:defRPr sz="1862" b="0" i="0" u="none" strike="noStrike" kern="1200" spc="0" baseline="0">
+                <a:solidFill>
+                  <a:schemeClr val="tx1">
+                    <a:lumMod val="65000"/>
+                    <a:lumOff val="35000"/>
+                  </a:schemeClr>
+                </a:solidFill>
+                <a:latin typeface="+mn-lt"/>
+                <a:ea typeface="+mn-ea"/>
+                <a:cs typeface="+mn-cs"/>
+              </a:defRPr>
+            </a:pPr>
+            <a:r>
+              <a:rPr lang="ja-JP" altLang="en-US" b="1" i="0">
+                <a:latin typeface="Meiryo" panose="020B0604030504040204" pitchFamily="34" charset="-128"/>
+                <a:ea typeface="Meiryo" panose="020B0604030504040204" pitchFamily="34" charset="-128"/>
+              </a:rPr>
+              <a:t>グラフタイトル</a:t>
+            </a:r>
+            <a:endParaRPr lang="en-US" altLang="ja-JP" b="1" i="0" dirty="0">
+              <a:latin typeface="Meiryo" panose="020B0604030504040204" pitchFamily="34" charset="-128"/>
+              <a:ea typeface="Meiryo" panose="020B0604030504040204" pitchFamily="34" charset="-128"/>
+            </a:endParaRPr>
+          </a:p>
+        </c:rich>
+      </c:tx>
+      <c:overlay val="0"/>
+      <c:spPr>
+        <a:noFill/>
+        <a:ln>
+          <a:noFill/>
+        </a:ln>
+        <a:effectLst/>
+      </c:spPr>
+      <c:txPr>
+        <a:bodyPr rot="0" spcFirstLastPara="1" vertOverflow="ellipsis" vert="horz" wrap="square" anchor="ctr" anchorCtr="1"/>
+        <a:lstStyle/>
+        <a:p>
+          <a:pPr>
+            <a:defRPr sz="1862" b="0" i="0" u="none" strike="noStrike" kern="1200" spc="0" baseline="0">
+              <a:solidFill>
+                <a:schemeClr val="tx1">
+                  <a:lumMod val="65000"/>
+                  <a:lumOff val="35000"/>
+                </a:schemeClr>
+              </a:solidFill>
+              <a:latin typeface="+mn-lt"/>
+              <a:ea typeface="+mn-ea"/>
+              <a:cs typeface="+mn-cs"/>
+            </a:defRPr>
+          </a:pPr>
+          <a:endParaRPr lang="en-US" altLang="ja-JP"/>
+        </a:p>
+      </c:txPr>
+    </c:title>
+    <c:autoTitleDeleted val="0"/>
+    <c:plotArea>
+      <c:layout/>
+      <c:lineChart>
+        <c:grouping val="standard"/>
+        <c:varyColors val="0"/>
+        <c:ser>
+          <c:idx val="0"/>
+          <c:order val="0"/>
+          <c:tx>
+            <c:strRef>
+              <c:f>Sheet1!$B$1</c:f>
+              <c:strCache>
+                <c:ptCount val="1"/>
+                <c:pt idx="0">
+                  <c:v>系列 1</c:v>
+                </c:pt>
+              </c:strCache>
+            </c:strRef>
+          </c:tx>
+          <c:spPr>
+            <a:ln w="28575" cap="rnd">
+              <a:solidFill>
+                <a:srgbClr val="C00000"/>
+              </a:solidFill>
+              <a:round/>
+            </a:ln>
+            <a:effectLst/>
+          </c:spPr>
+          <c:marker>
+            <c:symbol val="none"/>
+          </c:marker>
+          <c:dPt>
+            <c:idx val="0"/>
+            <c:marker>
+              <c:symbol val="none"/>
+            </c:marker>
+            <c:bubble3D val="0"/>
+            <c:spPr>
+              <a:ln w="28575" cap="rnd">
+                <a:solidFill>
+                  <a:srgbClr val="C00000"/>
+                </a:solidFill>
+                <a:round/>
+              </a:ln>
+              <a:effectLst/>
+            </c:spPr>
+            <c:extLst>
+              <c:ext xmlns:c16="http://schemas.microsoft.com/office/drawing/2014/chart" uri="{C3380CC4-5D6E-409C-BE32-E72D297353CC}">
+                <c16:uniqueId val="{00000003-DC49-C540-8C8E-3BA13D35B00A}"/>
+              </c:ext>
+            </c:extLst>
+          </c:dPt>
+          <c:dPt>
+            <c:idx val="1"/>
+            <c:marker>
+              <c:symbol val="none"/>
+            </c:marker>
+            <c:bubble3D val="0"/>
+            <c:spPr>
+              <a:ln w="28575" cap="rnd">
+                <a:solidFill>
+                  <a:srgbClr val="C00000"/>
+                </a:solidFill>
+                <a:round/>
+              </a:ln>
+              <a:effectLst/>
+            </c:spPr>
+            <c:extLst>
+              <c:ext xmlns:c16="http://schemas.microsoft.com/office/drawing/2014/chart" uri="{C3380CC4-5D6E-409C-BE32-E72D297353CC}">
+                <c16:uniqueId val="{00000004-DC49-C540-8C8E-3BA13D35B00A}"/>
+              </c:ext>
+            </c:extLst>
+          </c:dPt>
+          <c:dPt>
+            <c:idx val="2"/>
+            <c:marker>
+              <c:symbol val="none"/>
+            </c:marker>
+            <c:bubble3D val="0"/>
+            <c:spPr>
+              <a:ln w="28575" cap="rnd">
+                <a:solidFill>
+                  <a:srgbClr val="C00000"/>
+                </a:solidFill>
+                <a:round/>
+              </a:ln>
+              <a:effectLst/>
+            </c:spPr>
+            <c:extLst>
+              <c:ext xmlns:c16="http://schemas.microsoft.com/office/drawing/2014/chart" uri="{C3380CC4-5D6E-409C-BE32-E72D297353CC}">
+                <c16:uniqueId val="{00000005-DC49-C540-8C8E-3BA13D35B00A}"/>
+              </c:ext>
+            </c:extLst>
+          </c:dPt>
+          <c:dPt>
+            <c:idx val="3"/>
+            <c:marker>
+              <c:symbol val="none"/>
+            </c:marker>
+            <c:bubble3D val="0"/>
+            <c:spPr>
+              <a:ln w="28575" cap="rnd">
+                <a:solidFill>
+                  <a:srgbClr val="C00000"/>
+                </a:solidFill>
+                <a:round/>
+              </a:ln>
+              <a:effectLst/>
+            </c:spPr>
+            <c:extLst>
+              <c:ext xmlns:c16="http://schemas.microsoft.com/office/drawing/2014/chart" uri="{C3380CC4-5D6E-409C-BE32-E72D297353CC}">
+                <c16:uniqueId val="{00000006-DC49-C540-8C8E-3BA13D35B00A}"/>
+              </c:ext>
+            </c:extLst>
+          </c:dPt>
+          <c:cat>
+            <c:strRef>
+              <c:f>Sheet1!$A$2:$A$5</c:f>
+              <c:strCache>
+                <c:ptCount val="4"/>
+                <c:pt idx="0">
+                  <c:v>カテゴリ 1</c:v>
+                </c:pt>
+                <c:pt idx="1">
+                  <c:v>カテゴリ 2</c:v>
+                </c:pt>
+                <c:pt idx="2">
+                  <c:v>カテゴリ 3</c:v>
+                </c:pt>
+                <c:pt idx="3">
+                  <c:v>カテゴリ 4</c:v>
+                </c:pt>
+              </c:strCache>
+            </c:strRef>
+          </c:cat>
+          <c:val>
+            <c:numRef>
+              <c:f>Sheet1!$B$2:$B$5</c:f>
+              <c:numCache>
+                <c:formatCode>General</c:formatCode>
+                <c:ptCount val="4"/>
+                <c:pt idx="0">
+                  <c:v>4.3</c:v>
+                </c:pt>
+                <c:pt idx="1">
+                  <c:v>2.5</c:v>
+                </c:pt>
+                <c:pt idx="2">
+                  <c:v>3.5</c:v>
+                </c:pt>
+                <c:pt idx="3">
+                  <c:v>4.5</c:v>
+                </c:pt>
+              </c:numCache>
+            </c:numRef>
+          </c:val>
+          <c:smooth val="0"/>
+          <c:extLst>
+            <c:ext xmlns:c16="http://schemas.microsoft.com/office/drawing/2014/chart" uri="{C3380CC4-5D6E-409C-BE32-E72D297353CC}">
+              <c16:uniqueId val="{00000000-DC49-C540-8C8E-3BA13D35B00A}"/>
+            </c:ext>
+          </c:extLst>
+        </c:ser>
+        <c:dLbls>
+          <c:showLegendKey val="0"/>
+          <c:showVal val="0"/>
+          <c:showCatName val="0"/>
+          <c:showSerName val="0"/>
+          <c:showPercent val="0"/>
+          <c:showBubbleSize val="0"/>
+        </c:dLbls>
+        <c:smooth val="0"/>
+        <c:axId val="271478144"/>
+        <c:axId val="271467840"/>
+      </c:lineChart>
+      <c:catAx>
+        <c:axId val="271478144"/>
+        <c:scaling>
+          <c:orientation val="minMax"/>
+        </c:scaling>
+        <c:delete val="0"/>
+        <c:axPos val="b"/>
+        <c:numFmt formatCode="General" sourceLinked="1"/>
+        <c:majorTickMark val="none"/>
+        <c:minorTickMark val="none"/>
+        <c:tickLblPos val="nextTo"/>
+        <c:spPr>
+          <a:noFill/>
+          <a:ln w="9525" cap="flat" cmpd="sng" algn="ctr">
+            <a:solidFill>
+              <a:schemeClr val="tx1">
+                <a:lumMod val="15000"/>
+                <a:lumOff val="85000"/>
+              </a:schemeClr>
+            </a:solidFill>
+            <a:round/>
+          </a:ln>
+          <a:effectLst/>
+        </c:spPr>
+        <c:txPr>
+          <a:bodyPr rot="-60000000" spcFirstLastPara="1" vertOverflow="ellipsis" vert="horz" wrap="square" anchor="ctr" anchorCtr="1"/>
+          <a:lstStyle/>
+          <a:p>
+            <a:pPr>
+              <a:defRPr sz="1197" b="0" i="0" u="none" strike="noStrike" kern="1200" baseline="0">
+                <a:solidFill>
+                  <a:schemeClr val="tx1">
+                    <a:lumMod val="65000"/>
+                    <a:lumOff val="35000"/>
+                  </a:schemeClr>
+                </a:solidFill>
+                <a:latin typeface="+mn-lt"/>
+                <a:ea typeface="+mn-ea"/>
+                <a:cs typeface="+mn-cs"/>
+              </a:defRPr>
+            </a:pPr>
+            <a:endParaRPr lang="ja-JP"/>
+          </a:p>
+        </c:txPr>
+        <c:crossAx val="271467840"/>
+        <c:crosses val="autoZero"/>
+        <c:auto val="1"/>
+        <c:lblAlgn val="ctr"/>
+        <c:lblOffset val="100"/>
+        <c:noMultiLvlLbl val="0"/>
+      </c:catAx>
+      <c:valAx>
+        <c:axId val="271467840"/>
+        <c:scaling>
+          <c:orientation val="minMax"/>
+        </c:scaling>
+        <c:delete val="0"/>
+        <c:axPos val="l"/>
+        <c:majorGridlines>
+          <c:spPr>
+            <a:ln w="9525" cap="flat" cmpd="sng" algn="ctr">
+              <a:solidFill>
+                <a:schemeClr val="tx1">
+                  <a:lumMod val="15000"/>
+                  <a:lumOff val="85000"/>
+                </a:schemeClr>
+              </a:solidFill>
+              <a:round/>
+            </a:ln>
+            <a:effectLst/>
+          </c:spPr>
+        </c:majorGridlines>
+        <c:numFmt formatCode="General" sourceLinked="1"/>
+        <c:majorTickMark val="none"/>
+        <c:minorTickMark val="none"/>
+        <c:tickLblPos val="nextTo"/>
+        <c:spPr>
+          <a:noFill/>
+          <a:ln>
+            <a:noFill/>
+          </a:ln>
+          <a:effectLst/>
+        </c:spPr>
+        <c:txPr>
+          <a:bodyPr rot="-60000000" spcFirstLastPara="1" vertOverflow="ellipsis" vert="horz" wrap="square" anchor="ctr" anchorCtr="1"/>
+          <a:lstStyle/>
+          <a:p>
+            <a:pPr>
+              <a:defRPr sz="1197" b="0" i="0" u="none" strike="noStrike" kern="1200" baseline="0">
+                <a:solidFill>
+                  <a:schemeClr val="tx1">
+                    <a:lumMod val="65000"/>
+                    <a:lumOff val="35000"/>
+                  </a:schemeClr>
+                </a:solidFill>
+                <a:latin typeface="+mn-lt"/>
+                <a:ea typeface="+mn-ea"/>
+                <a:cs typeface="+mn-cs"/>
+              </a:defRPr>
+            </a:pPr>
+            <a:endParaRPr lang="ja-JP"/>
+          </a:p>
+        </c:txPr>
+        <c:crossAx val="271478144"/>
+        <c:crosses val="autoZero"/>
+        <c:crossBetween val="between"/>
+      </c:valAx>
+      <c:spPr>
+        <a:noFill/>
+        <a:ln>
+          <a:noFill/>
+        </a:ln>
+        <a:effectLst/>
+      </c:spPr>
+    </c:plotArea>
+    <c:plotVisOnly val="1"/>
+    <c:dispBlanksAs val="gap"/>
+    <c:showDLblsOverMax val="0"/>
+    <c:extLst>
+      <c:ext xmlns:c16r3="http://schemas.microsoft.com/office/drawing/2017/03/chart" uri="{56B9EC1D-385E-4148-901F-78D8002777C0}">
+        <c16r3:dataDisplayOptions16>
+          <c16r3:dispNaAsBlank val="1"/>
+        </c16r3:dataDisplayOptions16>
+      </c:ext>
+    </c:extLst>
+  </c:chart>
+  <c:spPr>
+    <a:noFill/>
+    <a:ln>
+      <a:noFill/>
+    </a:ln>
+    <a:effectLst/>
+  </c:spPr>
+  <c:txPr>
+    <a:bodyPr/>
+    <a:lstStyle/>
+    <a:p>
+      <a:pPr>
+        <a:defRPr/>
+      </a:pPr>
+      <a:endParaRPr lang="ja-JP"/>
+    </a:p>
+  </c:txPr>
+  <c:externalData r:id="rId3">
+    <c:autoUpdate val="0"/>
+  </c:externalData>
+</c:chartSpace>
+</file>
+
+<file path=ppt/charts/colors1.xml><?xml version="1.0" encoding="utf-8"?>
+<cs:colorStyle xmlns:cs="http://schemas.microsoft.com/office/drawing/2012/chartStyle" xmlns:a="http://schemas.openxmlformats.org/drawingml/2006/main" meth="cycle" id="10">
+  <a:schemeClr val="accent1"/>
+  <a:schemeClr val="accent2"/>
+  <a:schemeClr val="accent3"/>
+  <a:schemeClr val="accent4"/>
+  <a:schemeClr val="accent5"/>
+  <a:schemeClr val="accent6"/>
+  <cs:variation/>
+  <cs:variation>
+    <a:lumMod val="60000"/>
+  </cs:variation>
+  <cs:variation>
+    <a:lumMod val="80000"/>
+    <a:lumOff val="20000"/>
+  </cs:variation>
+  <cs:variation>
+    <a:lumMod val="80000"/>
+  </cs:variation>
+  <cs:variation>
+    <a:lumMod val="60000"/>
+    <a:lumOff val="40000"/>
+  </cs:variation>
+  <cs:variation>
+    <a:lumMod val="50000"/>
+  </cs:variation>
+  <cs:variation>
+    <a:lumMod val="70000"/>
+    <a:lumOff val="30000"/>
+  </cs:variation>
+  <cs:variation>
+    <a:lumMod val="70000"/>
+  </cs:variation>
+  <cs:variation>
+    <a:lumMod val="50000"/>
+    <a:lumOff val="50000"/>
+  </cs:variation>
+</cs:colorStyle>
+</file>
+
+<file path=ppt/charts/colors2.xml><?xml version="1.0" encoding="utf-8"?>
+<cs:colorStyle xmlns:cs="http://schemas.microsoft.com/office/drawing/2012/chartStyle" xmlns:a="http://schemas.openxmlformats.org/drawingml/2006/main" meth="cycle" id="10">
+  <a:schemeClr val="accent1"/>
+  <a:schemeClr val="accent2"/>
+  <a:schemeClr val="accent3"/>
+  <a:schemeClr val="accent4"/>
+  <a:schemeClr val="accent5"/>
+  <a:schemeClr val="accent6"/>
+  <cs:variation/>
+  <cs:variation>
+    <a:lumMod val="60000"/>
+  </cs:variation>
+  <cs:variation>
+    <a:lumMod val="80000"/>
+    <a:lumOff val="20000"/>
+  </cs:variation>
+  <cs:variation>
+    <a:lumMod val="80000"/>
+  </cs:variation>
+  <cs:variation>
+    <a:lumMod val="60000"/>
+    <a:lumOff val="40000"/>
+  </cs:variation>
+  <cs:variation>
+    <a:lumMod val="50000"/>
+  </cs:variation>
+  <cs:variation>
+    <a:lumMod val="70000"/>
+    <a:lumOff val="30000"/>
+  </cs:variation>
+  <cs:variation>
+    <a:lumMod val="70000"/>
+  </cs:variation>
+  <cs:variation>
+    <a:lumMod val="50000"/>
+    <a:lumOff val="50000"/>
+  </cs:variation>
+</cs:colorStyle>
+</file>
+
+<file path=ppt/charts/style1.xml><?xml version="1.0" encoding="utf-8"?>
+<cs:chartStyle xmlns:cs="http://schemas.microsoft.com/office/drawing/2012/chartStyle" xmlns:a="http://schemas.openxmlformats.org/drawingml/2006/main" id="201">
+  <cs:axisTitle>
+    <cs:lnRef idx="0"/>
+    <cs:fillRef idx="0"/>
+    <cs:effectRef idx="0"/>
+    <cs:fontRef idx="minor">
+      <a:schemeClr val="tx1">
+        <a:lumMod val="65000"/>
+        <a:lumOff val="35000"/>
+      </a:schemeClr>
+    </cs:fontRef>
+    <cs:defRPr sz="1330" kern="1200"/>
+  </cs:axisTitle>
+  <cs:categoryAxis>
+    <cs:lnRef idx="0"/>
+    <cs:fillRef idx="0"/>
+    <cs:effectRef idx="0"/>
+    <cs:fontRef idx="minor">
+      <a:schemeClr val="tx1">
+        <a:lumMod val="65000"/>
+        <a:lumOff val="35000"/>
+      </a:schemeClr>
+    </cs:fontRef>
+    <cs:spPr>
+      <a:ln w="9525" cap="flat" cmpd="sng" algn="ctr">
+        <a:solidFill>
+          <a:schemeClr val="tx1">
+            <a:lumMod val="15000"/>
+            <a:lumOff val="85000"/>
+          </a:schemeClr>
+        </a:solidFill>
+        <a:round/>
+      </a:ln>
+    </cs:spPr>
+    <cs:defRPr sz="1197" kern="1200"/>
+  </cs:categoryAxis>
+  <cs:chartArea mods="allowNoFillOverride allowNoLineOverride">
+    <cs:lnRef idx="0"/>
+    <cs:fillRef idx="0"/>
+    <cs:effectRef idx="0"/>
+    <cs:fontRef idx="minor">
+      <a:schemeClr val="tx1"/>
+    </cs:fontRef>
+    <cs:spPr>
+      <a:solidFill>
+        <a:schemeClr val="bg1"/>
+      </a:solidFill>
+      <a:ln w="9525" cap="flat" cmpd="sng" algn="ctr">
+        <a:solidFill>
+          <a:schemeClr val="tx1">
+            <a:lumMod val="15000"/>
+            <a:lumOff val="85000"/>
+          </a:schemeClr>
+        </a:solidFill>
+        <a:round/>
+      </a:ln>
+    </cs:spPr>
+    <cs:defRPr sz="1330" kern="1200"/>
+  </cs:chartArea>
+  <cs:dataLabel>
+    <cs:lnRef idx="0"/>
+    <cs:fillRef idx="0"/>
+    <cs:effectRef idx="0"/>
+    <cs:fontRef idx="minor">
+      <a:schemeClr val="tx1">
+        <a:lumMod val="75000"/>
+        <a:lumOff val="25000"/>
+      </a:schemeClr>
+    </cs:fontRef>
+    <cs:defRPr sz="1197" kern="1200"/>
+  </cs:dataLabel>
+  <cs:dataLabelCallout>
+    <cs:lnRef idx="0"/>
+    <cs:fillRef idx="0"/>
+    <cs:effectRef idx="0"/>
+    <cs:fontRef idx="minor">
+      <a:schemeClr val="dk1">
+        <a:lumMod val="65000"/>
+        <a:lumOff val="35000"/>
+      </a:schemeClr>
+    </cs:fontRef>
+    <cs:spPr>
+      <a:solidFill>
+        <a:schemeClr val="lt1"/>
+      </a:solidFill>
+      <a:ln>
+        <a:solidFill>
+          <a:schemeClr val="dk1">
+            <a:lumMod val="25000"/>
+            <a:lumOff val="75000"/>
+          </a:schemeClr>
+        </a:solidFill>
+      </a:ln>
+    </cs:spPr>
+    <cs:defRPr sz="1197" kern="1200"/>
+    <cs:bodyPr rot="0" spcFirstLastPara="1" vertOverflow="clip" horzOverflow="clip" vert="horz" wrap="square" lIns="36576" tIns="18288" rIns="36576" bIns="18288" anchor="ctr" anchorCtr="1">
+      <a:spAutoFit/>
+    </cs:bodyPr>
+  </cs:dataLabelCallout>
+  <cs:dataPoint>
+    <cs:lnRef idx="0"/>
+    <cs:fillRef idx="1">
+      <cs:styleClr val="auto"/>
+    </cs:fillRef>
+    <cs:effectRef idx="0"/>
+    <cs:fontRef idx="minor">
+      <a:schemeClr val="tx1"/>
+    </cs:fontRef>
+  </cs:dataPoint>
+  <cs:dataPoint3D>
+    <cs:lnRef idx="0"/>
+    <cs:fillRef idx="1">
+      <cs:styleClr val="auto"/>
+    </cs:fillRef>
+    <cs:effectRef idx="0"/>
+    <cs:fontRef idx="minor">
+      <a:schemeClr val="tx1"/>
+    </cs:fontRef>
+  </cs:dataPoint3D>
+  <cs:dataPointLine>
+    <cs:lnRef idx="0">
+      <cs:styleClr val="auto"/>
+    </cs:lnRef>
+    <cs:fillRef idx="1"/>
+    <cs:effectRef idx="0"/>
+    <cs:fontRef idx="minor">
+      <a:schemeClr val="tx1"/>
+    </cs:fontRef>
+    <cs:spPr>
+      <a:ln w="28575" cap="rnd">
+        <a:solidFill>
+          <a:schemeClr val="phClr"/>
+        </a:solidFill>
+        <a:round/>
+      </a:ln>
+    </cs:spPr>
+  </cs:dataPointLine>
+  <cs:dataPointMarker>
+    <cs:lnRef idx="0">
+      <cs:styleClr val="auto"/>
+    </cs:lnRef>
+    <cs:fillRef idx="1">
+      <cs:styleClr val="auto"/>
+    </cs:fillRef>
+    <cs:effectRef idx="0"/>
+    <cs:fontRef idx="minor">
+      <a:schemeClr val="tx1"/>
+    </cs:fontRef>
+    <cs:spPr>
+      <a:ln w="9525">
+        <a:solidFill>
+          <a:schemeClr val="phClr"/>
+        </a:solidFill>
+      </a:ln>
+    </cs:spPr>
+  </cs:dataPointMarker>
+  <cs:dataPointMarkerLayout symbol="circle" size="5"/>
+  <cs:dataPointWireframe>
+    <cs:lnRef idx="0">
+      <cs:styleClr val="auto"/>
+    </cs:lnRef>
+    <cs:fillRef idx="1"/>
+    <cs:effectRef idx="0"/>
+    <cs:fontRef idx="minor">
+      <a:schemeClr val="tx1"/>
+    </cs:fontRef>
+    <cs:spPr>
+      <a:ln w="9525" cap="rnd">
+        <a:solidFill>
+          <a:schemeClr val="phClr"/>
+        </a:solidFill>
+        <a:round/>
+      </a:ln>
+    </cs:spPr>
+  </cs:dataPointWireframe>
+  <cs:dataTable>
+    <cs:lnRef idx="0"/>
+    <cs:fillRef idx="0"/>
+    <cs:effectRef idx="0"/>
+    <cs:fontRef idx="minor">
+      <a:schemeClr val="tx1">
+        <a:lumMod val="65000"/>
+        <a:lumOff val="35000"/>
+      </a:schemeClr>
+    </cs:fontRef>
+    <cs:spPr>
+      <a:noFill/>
+      <a:ln w="9525" cap="flat" cmpd="sng" algn="ctr">
+        <a:solidFill>
+          <a:schemeClr val="tx1">
+            <a:lumMod val="15000"/>
+            <a:lumOff val="85000"/>
+          </a:schemeClr>
+        </a:solidFill>
+        <a:round/>
+      </a:ln>
+    </cs:spPr>
+    <cs:defRPr sz="1197" kern="1200"/>
+  </cs:dataTable>
+  <cs:downBar>
+    <cs:lnRef idx="0"/>
+    <cs:fillRef idx="0"/>
+    <cs:effectRef idx="0"/>
+    <cs:fontRef idx="minor">
+      <a:schemeClr val="dk1"/>
+    </cs:fontRef>
+    <cs:spPr>
+      <a:solidFill>
+        <a:schemeClr val="dk1">
+          <a:lumMod val="65000"/>
+          <a:lumOff val="35000"/>
+        </a:schemeClr>
+      </a:solidFill>
+      <a:ln w="9525">
+        <a:solidFill>
+          <a:schemeClr val="tx1">
+            <a:lumMod val="65000"/>
+            <a:lumOff val="35000"/>
+          </a:schemeClr>
+        </a:solidFill>
+      </a:ln>
+    </cs:spPr>
+  </cs:downBar>
+  <cs:dropLine>
+    <cs:lnRef idx="0"/>
+    <cs:fillRef idx="0"/>
+    <cs:effectRef idx="0"/>
+    <cs:fontRef idx="minor">
+      <a:schemeClr val="tx1"/>
+    </cs:fontRef>
+    <cs:spPr>
+      <a:ln w="9525" cap="flat" cmpd="sng" algn="ctr">
+        <a:solidFill>
+          <a:schemeClr val="tx1">
+            <a:lumMod val="35000"/>
+            <a:lumOff val="65000"/>
+          </a:schemeClr>
+        </a:solidFill>
+        <a:round/>
+      </a:ln>
+    </cs:spPr>
+  </cs:dropLine>
+  <cs:errorBar>
+    <cs:lnRef idx="0"/>
+    <cs:fillRef idx="0"/>
+    <cs:effectRef idx="0"/>
+    <cs:fontRef idx="minor">
+      <a:schemeClr val="tx1"/>
+    </cs:fontRef>
+    <cs:spPr>
+      <a:ln w="9525" cap="flat" cmpd="sng" algn="ctr">
+        <a:solidFill>
+          <a:schemeClr val="tx1">
+            <a:lumMod val="65000"/>
+            <a:lumOff val="35000"/>
+          </a:schemeClr>
+        </a:solidFill>
+        <a:round/>
+      </a:ln>
+    </cs:spPr>
+  </cs:errorBar>
+  <cs:floor>
+    <cs:lnRef idx="0"/>
+    <cs:fillRef idx="0"/>
+    <cs:effectRef idx="0"/>
+    <cs:fontRef idx="minor">
+      <a:schemeClr val="tx1"/>
+    </cs:fontRef>
+    <cs:spPr>
+      <a:noFill/>
+      <a:ln>
+        <a:noFill/>
+      </a:ln>
+    </cs:spPr>
+  </cs:floor>
+  <cs:gridlineMajor>
+    <cs:lnRef idx="0"/>
+    <cs:fillRef idx="0"/>
+    <cs:effectRef idx="0"/>
+    <cs:fontRef idx="minor">
+      <a:schemeClr val="tx1"/>
+    </cs:fontRef>
+    <cs:spPr>
+      <a:ln w="9525" cap="flat" cmpd="sng" algn="ctr">
+        <a:solidFill>
+          <a:schemeClr val="tx1">
+            <a:lumMod val="15000"/>
+            <a:lumOff val="85000"/>
+          </a:schemeClr>
+        </a:solidFill>
+        <a:round/>
+      </a:ln>
+    </cs:spPr>
+  </cs:gridlineMajor>
+  <cs:gridlineMinor>
+    <cs:lnRef idx="0"/>
+    <cs:fillRef idx="0"/>
+    <cs:effectRef idx="0"/>
+    <cs:fontRef idx="minor">
+      <a:schemeClr val="tx1"/>
+    </cs:fontRef>
+    <cs:spPr>
+      <a:ln w="9525" cap="flat" cmpd="sng" algn="ctr">
+        <a:solidFill>
+          <a:schemeClr val="tx1">
+            <a:lumMod val="5000"/>
+            <a:lumOff val="95000"/>
+          </a:schemeClr>
+        </a:solidFill>
+        <a:round/>
+      </a:ln>
+    </cs:spPr>
+  </cs:gridlineMinor>
+  <cs:hiLoLine>
+    <cs:lnRef idx="0"/>
+    <cs:fillRef idx="0"/>
+    <cs:effectRef idx="0"/>
+    <cs:fontRef idx="minor">
+      <a:schemeClr val="tx1"/>
+    </cs:fontRef>
+    <cs:spPr>
+      <a:ln w="9525" cap="flat" cmpd="sng" algn="ctr">
+        <a:solidFill>
+          <a:schemeClr val="tx1">
+            <a:lumMod val="75000"/>
+            <a:lumOff val="25000"/>
+          </a:schemeClr>
+        </a:solidFill>
+        <a:round/>
+      </a:ln>
+    </cs:spPr>
+  </cs:hiLoLine>
+  <cs:leaderLine>
+    <cs:lnRef idx="0"/>
+    <cs:fillRef idx="0"/>
+    <cs:effectRef idx="0"/>
+    <cs:fontRef idx="minor">
+      <a:schemeClr val="tx1"/>
+    </cs:fontRef>
+    <cs:spPr>
+      <a:ln w="9525" cap="flat" cmpd="sng" algn="ctr">
+        <a:solidFill>
+          <a:schemeClr val="tx1">
+            <a:lumMod val="35000"/>
+            <a:lumOff val="65000"/>
+          </a:schemeClr>
+        </a:solidFill>
+        <a:round/>
+      </a:ln>
+    </cs:spPr>
+  </cs:leaderLine>
+  <cs:legend>
+    <cs:lnRef idx="0"/>
+    <cs:fillRef idx="0"/>
+    <cs:effectRef idx="0"/>
+    <cs:fontRef idx="minor">
+      <a:schemeClr val="tx1">
+        <a:lumMod val="65000"/>
+        <a:lumOff val="35000"/>
+      </a:schemeClr>
+    </cs:fontRef>
+    <cs:defRPr sz="1197" kern="1200"/>
+  </cs:legend>
+  <cs:plotArea mods="allowNoFillOverride allowNoLineOverride">
+    <cs:lnRef idx="0"/>
+    <cs:fillRef idx="0"/>
+    <cs:effectRef idx="0"/>
+    <cs:fontRef idx="minor">
+      <a:schemeClr val="tx1"/>
+    </cs:fontRef>
+  </cs:plotArea>
+  <cs:plotArea3D mods="allowNoFillOverride allowNoLineOverride">
+    <cs:lnRef idx="0"/>
+    <cs:fillRef idx="0"/>
+    <cs:effectRef idx="0"/>
+    <cs:fontRef idx="minor">
+      <a:schemeClr val="tx1"/>
+    </cs:fontRef>
+  </cs:plotArea3D>
+  <cs:seriesAxis>
+    <cs:lnRef idx="0"/>
+    <cs:fillRef idx="0"/>
+    <cs:effectRef idx="0"/>
+    <cs:fontRef idx="minor">
+      <a:schemeClr val="tx1">
+        <a:lumMod val="65000"/>
+        <a:lumOff val="35000"/>
+      </a:schemeClr>
+    </cs:fontRef>
+    <cs:defRPr sz="1197" kern="1200"/>
+  </cs:seriesAxis>
+  <cs:seriesLine>
+    <cs:lnRef idx="0"/>
+    <cs:fillRef idx="0"/>
+    <cs:effectRef idx="0"/>
+    <cs:fontRef idx="minor">
+      <a:schemeClr val="tx1"/>
+    </cs:fontRef>
+    <cs:spPr>
+      <a:ln w="9525" cap="flat" cmpd="sng" algn="ctr">
+        <a:solidFill>
+          <a:schemeClr val="tx1">
+            <a:lumMod val="35000"/>
+            <a:lumOff val="65000"/>
+          </a:schemeClr>
+        </a:solidFill>
+        <a:round/>
+      </a:ln>
+    </cs:spPr>
+  </cs:seriesLine>
+  <cs:title>
+    <cs:lnRef idx="0"/>
+    <cs:fillRef idx="0"/>
+    <cs:effectRef idx="0"/>
+    <cs:fontRef idx="minor">
+      <a:schemeClr val="tx1">
+        <a:lumMod val="65000"/>
+        <a:lumOff val="35000"/>
+      </a:schemeClr>
+    </cs:fontRef>
+    <cs:defRPr sz="1862" b="0" kern="1200" spc="0" baseline="0"/>
+  </cs:title>
+  <cs:trendline>
+    <cs:lnRef idx="0">
+      <cs:styleClr val="auto"/>
+    </cs:lnRef>
+    <cs:fillRef idx="0"/>
+    <cs:effectRef idx="0"/>
+    <cs:fontRef idx="minor">
+      <a:schemeClr val="tx1"/>
+    </cs:fontRef>
+    <cs:spPr>
+      <a:ln w="19050" cap="rnd">
+        <a:solidFill>
+          <a:schemeClr val="phClr"/>
+        </a:solidFill>
+        <a:prstDash val="sysDot"/>
+      </a:ln>
+    </cs:spPr>
+  </cs:trendline>
+  <cs:trendlineLabel>
+    <cs:lnRef idx="0"/>
+    <cs:fillRef idx="0"/>
+    <cs:effectRef idx="0"/>
+    <cs:fontRef idx="minor">
+      <a:schemeClr val="tx1">
+        <a:lumMod val="65000"/>
+        <a:lumOff val="35000"/>
+      </a:schemeClr>
+    </cs:fontRef>
+    <cs:defRPr sz="1197" kern="1200"/>
+  </cs:trendlineLabel>
+  <cs:upBar>
+    <cs:lnRef idx="0"/>
+    <cs:fillRef idx="0"/>
+    <cs:effectRef idx="0"/>
+    <cs:fontRef idx="minor">
+      <a:schemeClr val="dk1"/>
+    </cs:fontRef>
+    <cs:spPr>
+      <a:solidFill>
+        <a:schemeClr val="lt1"/>
+      </a:solidFill>
+      <a:ln w="9525">
+        <a:solidFill>
+          <a:schemeClr val="tx1">
+            <a:lumMod val="15000"/>
+            <a:lumOff val="85000"/>
+          </a:schemeClr>
+        </a:solidFill>
+      </a:ln>
+    </cs:spPr>
+  </cs:upBar>
+  <cs:valueAxis>
+    <cs:lnRef idx="0"/>
+    <cs:fillRef idx="0"/>
+    <cs:effectRef idx="0"/>
+    <cs:fontRef idx="minor">
+      <a:schemeClr val="tx1">
+        <a:lumMod val="65000"/>
+        <a:lumOff val="35000"/>
+      </a:schemeClr>
+    </cs:fontRef>
+    <cs:defRPr sz="1197" kern="1200"/>
+  </cs:valueAxis>
+  <cs:wall>
+    <cs:lnRef idx="0"/>
+    <cs:fillRef idx="0"/>
+    <cs:effectRef idx="0"/>
+    <cs:fontRef idx="minor">
+      <a:schemeClr val="tx1"/>
+    </cs:fontRef>
+    <cs:spPr>
+      <a:noFill/>
+      <a:ln>
+        <a:noFill/>
+      </a:ln>
+    </cs:spPr>
+  </cs:wall>
+</cs:chartStyle>
+</file>
+
+<file path=ppt/charts/style2.xml><?xml version="1.0" encoding="utf-8"?>
+<cs:chartStyle xmlns:cs="http://schemas.microsoft.com/office/drawing/2012/chartStyle" xmlns:a="http://schemas.openxmlformats.org/drawingml/2006/main" id="201">
+  <cs:axisTitle>
+    <cs:lnRef idx="0"/>
+    <cs:fillRef idx="0"/>
+    <cs:effectRef idx="0"/>
+    <cs:fontRef idx="minor">
+      <a:schemeClr val="tx1">
+        <a:lumMod val="65000"/>
+        <a:lumOff val="35000"/>
+      </a:schemeClr>
+    </cs:fontRef>
+    <cs:defRPr sz="1330" kern="1200"/>
+  </cs:axisTitle>
+  <cs:categoryAxis>
+    <cs:lnRef idx="0"/>
+    <cs:fillRef idx="0"/>
+    <cs:effectRef idx="0"/>
+    <cs:fontRef idx="minor">
+      <a:schemeClr val="tx1">
+        <a:lumMod val="65000"/>
+        <a:lumOff val="35000"/>
+      </a:schemeClr>
+    </cs:fontRef>
+    <cs:spPr>
+      <a:ln w="9525" cap="flat" cmpd="sng" algn="ctr">
+        <a:solidFill>
+          <a:schemeClr val="tx1">
+            <a:lumMod val="15000"/>
+            <a:lumOff val="85000"/>
+          </a:schemeClr>
+        </a:solidFill>
+        <a:round/>
+      </a:ln>
+    </cs:spPr>
+    <cs:defRPr sz="1197" kern="1200"/>
+  </cs:categoryAxis>
+  <cs:chartArea mods="allowNoFillOverride allowNoLineOverride">
+    <cs:lnRef idx="0"/>
+    <cs:fillRef idx="0"/>
+    <cs:effectRef idx="0"/>
+    <cs:fontRef idx="minor">
+      <a:schemeClr val="tx1"/>
+    </cs:fontRef>
+    <cs:spPr>
+      <a:solidFill>
+        <a:schemeClr val="bg1"/>
+      </a:solidFill>
+      <a:ln w="9525" cap="flat" cmpd="sng" algn="ctr">
+        <a:solidFill>
+          <a:schemeClr val="tx1">
+            <a:lumMod val="15000"/>
+            <a:lumOff val="85000"/>
+          </a:schemeClr>
+        </a:solidFill>
+        <a:round/>
+      </a:ln>
+    </cs:spPr>
+    <cs:defRPr sz="1330" kern="1200"/>
+  </cs:chartArea>
+  <cs:dataLabel>
+    <cs:lnRef idx="0"/>
+    <cs:fillRef idx="0"/>
+    <cs:effectRef idx="0"/>
+    <cs:fontRef idx="minor">
+      <a:schemeClr val="tx1">
+        <a:lumMod val="75000"/>
+        <a:lumOff val="25000"/>
+      </a:schemeClr>
+    </cs:fontRef>
+    <cs:defRPr sz="1197" kern="1200"/>
+  </cs:dataLabel>
+  <cs:dataLabelCallout>
+    <cs:lnRef idx="0"/>
+    <cs:fillRef idx="0"/>
+    <cs:effectRef idx="0"/>
+    <cs:fontRef idx="minor">
+      <a:schemeClr val="dk1">
+        <a:lumMod val="65000"/>
+        <a:lumOff val="35000"/>
+      </a:schemeClr>
+    </cs:fontRef>
+    <cs:spPr>
+      <a:solidFill>
+        <a:schemeClr val="lt1"/>
+      </a:solidFill>
+      <a:ln>
+        <a:solidFill>
+          <a:schemeClr val="dk1">
+            <a:lumMod val="25000"/>
+            <a:lumOff val="75000"/>
+          </a:schemeClr>
+        </a:solidFill>
+      </a:ln>
+    </cs:spPr>
+    <cs:defRPr sz="1197" kern="1200"/>
+    <cs:bodyPr rot="0" spcFirstLastPara="1" vertOverflow="clip" horzOverflow="clip" vert="horz" wrap="square" lIns="36576" tIns="18288" rIns="36576" bIns="18288" anchor="ctr" anchorCtr="1">
+      <a:spAutoFit/>
+    </cs:bodyPr>
+  </cs:dataLabelCallout>
+  <cs:dataPoint>
+    <cs:lnRef idx="0"/>
+    <cs:fillRef idx="1">
+      <cs:styleClr val="auto"/>
+    </cs:fillRef>
+    <cs:effectRef idx="0"/>
+    <cs:fontRef idx="minor">
+      <a:schemeClr val="tx1"/>
+    </cs:fontRef>
+  </cs:dataPoint>
+  <cs:dataPoint3D>
+    <cs:lnRef idx="0"/>
+    <cs:fillRef idx="1">
+      <cs:styleClr val="auto"/>
+    </cs:fillRef>
+    <cs:effectRef idx="0"/>
+    <cs:fontRef idx="minor">
+      <a:schemeClr val="tx1"/>
+    </cs:fontRef>
+  </cs:dataPoint3D>
+  <cs:dataPointLine>
+    <cs:lnRef idx="0">
+      <cs:styleClr val="auto"/>
+    </cs:lnRef>
+    <cs:fillRef idx="1"/>
+    <cs:effectRef idx="0"/>
+    <cs:fontRef idx="minor">
+      <a:schemeClr val="tx1"/>
+    </cs:fontRef>
+    <cs:spPr>
+      <a:ln w="28575" cap="rnd">
+        <a:solidFill>
+          <a:schemeClr val="phClr"/>
+        </a:solidFill>
+        <a:round/>
+      </a:ln>
+    </cs:spPr>
+  </cs:dataPointLine>
+  <cs:dataPointMarker>
+    <cs:lnRef idx="0">
+      <cs:styleClr val="auto"/>
+    </cs:lnRef>
+    <cs:fillRef idx="1">
+      <cs:styleClr val="auto"/>
+    </cs:fillRef>
+    <cs:effectRef idx="0"/>
+    <cs:fontRef idx="minor">
+      <a:schemeClr val="tx1"/>
+    </cs:fontRef>
+    <cs:spPr>
+      <a:ln w="9525">
+        <a:solidFill>
+          <a:schemeClr val="phClr"/>
+        </a:solidFill>
+      </a:ln>
+    </cs:spPr>
+  </cs:dataPointMarker>
+  <cs:dataPointMarkerLayout symbol="circle" size="5"/>
+  <cs:dataPointWireframe>
+    <cs:lnRef idx="0">
+      <cs:styleClr val="auto"/>
+    </cs:lnRef>
+    <cs:fillRef idx="1"/>
+    <cs:effectRef idx="0"/>
+    <cs:fontRef idx="minor">
+      <a:schemeClr val="tx1"/>
+    </cs:fontRef>
+    <cs:spPr>
+      <a:ln w="9525" cap="rnd">
+        <a:solidFill>
+          <a:schemeClr val="phClr"/>
+        </a:solidFill>
+        <a:round/>
+      </a:ln>
+    </cs:spPr>
+  </cs:dataPointWireframe>
+  <cs:dataTable>
+    <cs:lnRef idx="0"/>
+    <cs:fillRef idx="0"/>
+    <cs:effectRef idx="0"/>
+    <cs:fontRef idx="minor">
+      <a:schemeClr val="tx1">
+        <a:lumMod val="65000"/>
+        <a:lumOff val="35000"/>
+      </a:schemeClr>
+    </cs:fontRef>
+    <cs:spPr>
+      <a:noFill/>
+      <a:ln w="9525" cap="flat" cmpd="sng" algn="ctr">
+        <a:solidFill>
+          <a:schemeClr val="tx1">
+            <a:lumMod val="15000"/>
+            <a:lumOff val="85000"/>
+          </a:schemeClr>
+        </a:solidFill>
+        <a:round/>
+      </a:ln>
+    </cs:spPr>
+    <cs:defRPr sz="1197" kern="1200"/>
+  </cs:dataTable>
+  <cs:downBar>
+    <cs:lnRef idx="0"/>
+    <cs:fillRef idx="0"/>
+    <cs:effectRef idx="0"/>
+    <cs:fontRef idx="minor">
+      <a:schemeClr val="dk1"/>
+    </cs:fontRef>
+    <cs:spPr>
+      <a:solidFill>
+        <a:schemeClr val="dk1">
+          <a:lumMod val="65000"/>
+          <a:lumOff val="35000"/>
+        </a:schemeClr>
+      </a:solidFill>
+      <a:ln w="9525">
+        <a:solidFill>
+          <a:schemeClr val="tx1">
+            <a:lumMod val="65000"/>
+            <a:lumOff val="35000"/>
+          </a:schemeClr>
+        </a:solidFill>
+      </a:ln>
+    </cs:spPr>
+  </cs:downBar>
+  <cs:dropLine>
+    <cs:lnRef idx="0"/>
+    <cs:fillRef idx="0"/>
+    <cs:effectRef idx="0"/>
+    <cs:fontRef idx="minor">
+      <a:schemeClr val="tx1"/>
+    </cs:fontRef>
+    <cs:spPr>
+      <a:ln w="9525" cap="flat" cmpd="sng" algn="ctr">
+        <a:solidFill>
+          <a:schemeClr val="tx1">
+            <a:lumMod val="35000"/>
+            <a:lumOff val="65000"/>
+          </a:schemeClr>
+        </a:solidFill>
+        <a:round/>
+      </a:ln>
+    </cs:spPr>
+  </cs:dropLine>
+  <cs:errorBar>
+    <cs:lnRef idx="0"/>
+    <cs:fillRef idx="0"/>
+    <cs:effectRef idx="0"/>
+    <cs:fontRef idx="minor">
+      <a:schemeClr val="tx1"/>
+    </cs:fontRef>
+    <cs:spPr>
+      <a:ln w="9525" cap="flat" cmpd="sng" algn="ctr">
+        <a:solidFill>
+          <a:schemeClr val="tx1">
+            <a:lumMod val="65000"/>
+            <a:lumOff val="35000"/>
+          </a:schemeClr>
+        </a:solidFill>
+        <a:round/>
+      </a:ln>
+    </cs:spPr>
+  </cs:errorBar>
+  <cs:floor>
+    <cs:lnRef idx="0"/>
+    <cs:fillRef idx="0"/>
+    <cs:effectRef idx="0"/>
+    <cs:fontRef idx="minor">
+      <a:schemeClr val="tx1"/>
+    </cs:fontRef>
+    <cs:spPr>
+      <a:noFill/>
+      <a:ln>
+        <a:noFill/>
+      </a:ln>
+    </cs:spPr>
+  </cs:floor>
+  <cs:gridlineMajor>
+    <cs:lnRef idx="0"/>
+    <cs:fillRef idx="0"/>
+    <cs:effectRef idx="0"/>
+    <cs:fontRef idx="minor">
+      <a:schemeClr val="tx1"/>
+    </cs:fontRef>
+    <cs:spPr>
+      <a:ln w="9525" cap="flat" cmpd="sng" algn="ctr">
+        <a:solidFill>
+          <a:schemeClr val="tx1">
+            <a:lumMod val="15000"/>
+            <a:lumOff val="85000"/>
+          </a:schemeClr>
+        </a:solidFill>
+        <a:round/>
+      </a:ln>
+    </cs:spPr>
+  </cs:gridlineMajor>
+  <cs:gridlineMinor>
+    <cs:lnRef idx="0"/>
+    <cs:fillRef idx="0"/>
+    <cs:effectRef idx="0"/>
+    <cs:fontRef idx="minor">
+      <a:schemeClr val="tx1"/>
+    </cs:fontRef>
+    <cs:spPr>
+      <a:ln w="9525" cap="flat" cmpd="sng" algn="ctr">
+        <a:solidFill>
+          <a:schemeClr val="tx1">
+            <a:lumMod val="5000"/>
+            <a:lumOff val="95000"/>
+          </a:schemeClr>
+        </a:solidFill>
+        <a:round/>
+      </a:ln>
+    </cs:spPr>
+  </cs:gridlineMinor>
+  <cs:hiLoLine>
+    <cs:lnRef idx="0"/>
+    <cs:fillRef idx="0"/>
+    <cs:effectRef idx="0"/>
+    <cs:fontRef idx="minor">
+      <a:schemeClr val="tx1"/>
+    </cs:fontRef>
+    <cs:spPr>
+      <a:ln w="9525" cap="flat" cmpd="sng" algn="ctr">
+        <a:solidFill>
+          <a:schemeClr val="tx1">
+            <a:lumMod val="75000"/>
+            <a:lumOff val="25000"/>
+          </a:schemeClr>
+        </a:solidFill>
+        <a:round/>
+      </a:ln>
+    </cs:spPr>
+  </cs:hiLoLine>
+  <cs:leaderLine>
+    <cs:lnRef idx="0"/>
+    <cs:fillRef idx="0"/>
+    <cs:effectRef idx="0"/>
+    <cs:fontRef idx="minor">
+      <a:schemeClr val="tx1"/>
+    </cs:fontRef>
+    <cs:spPr>
+      <a:ln w="9525" cap="flat" cmpd="sng" algn="ctr">
+        <a:solidFill>
+          <a:schemeClr val="tx1">
+            <a:lumMod val="35000"/>
+            <a:lumOff val="65000"/>
+          </a:schemeClr>
+        </a:solidFill>
+        <a:round/>
+      </a:ln>
+    </cs:spPr>
+  </cs:leaderLine>
+  <cs:legend>
+    <cs:lnRef idx="0"/>
+    <cs:fillRef idx="0"/>
+    <cs:effectRef idx="0"/>
+    <cs:fontRef idx="minor">
+      <a:schemeClr val="tx1">
+        <a:lumMod val="65000"/>
+        <a:lumOff val="35000"/>
+      </a:schemeClr>
+    </cs:fontRef>
+    <cs:defRPr sz="1197" kern="1200"/>
+  </cs:legend>
+  <cs:plotArea mods="allowNoFillOverride allowNoLineOverride">
+    <cs:lnRef idx="0"/>
+    <cs:fillRef idx="0"/>
+    <cs:effectRef idx="0"/>
+    <cs:fontRef idx="minor">
+      <a:schemeClr val="tx1"/>
+    </cs:fontRef>
+  </cs:plotArea>
+  <cs:plotArea3D mods="allowNoFillOverride allowNoLineOverride">
+    <cs:lnRef idx="0"/>
+    <cs:fillRef idx="0"/>
+    <cs:effectRef idx="0"/>
+    <cs:fontRef idx="minor">
+      <a:schemeClr val="tx1"/>
+    </cs:fontRef>
+  </cs:plotArea3D>
+  <cs:seriesAxis>
+    <cs:lnRef idx="0"/>
+    <cs:fillRef idx="0"/>
+    <cs:effectRef idx="0"/>
+    <cs:fontRef idx="minor">
+      <a:schemeClr val="tx1">
+        <a:lumMod val="65000"/>
+        <a:lumOff val="35000"/>
+      </a:schemeClr>
+    </cs:fontRef>
+    <cs:defRPr sz="1197" kern="1200"/>
+  </cs:seriesAxis>
+  <cs:seriesLine>
+    <cs:lnRef idx="0"/>
+    <cs:fillRef idx="0"/>
+    <cs:effectRef idx="0"/>
+    <cs:fontRef idx="minor">
+      <a:schemeClr val="tx1"/>
+    </cs:fontRef>
+    <cs:spPr>
+      <a:ln w="9525" cap="flat" cmpd="sng" algn="ctr">
+        <a:solidFill>
+          <a:schemeClr val="tx1">
+            <a:lumMod val="35000"/>
+            <a:lumOff val="65000"/>
+          </a:schemeClr>
+        </a:solidFill>
+        <a:round/>
+      </a:ln>
+    </cs:spPr>
+  </cs:seriesLine>
+  <cs:title>
+    <cs:lnRef idx="0"/>
+    <cs:fillRef idx="0"/>
+    <cs:effectRef idx="0"/>
+    <cs:fontRef idx="minor">
+      <a:schemeClr val="tx1">
+        <a:lumMod val="65000"/>
+        <a:lumOff val="35000"/>
+      </a:schemeClr>
+    </cs:fontRef>
+    <cs:defRPr sz="1862" b="0" kern="1200" spc="0" baseline="0"/>
+  </cs:title>
+  <cs:trendline>
+    <cs:lnRef idx="0">
+      <cs:styleClr val="auto"/>
+    </cs:lnRef>
+    <cs:fillRef idx="0"/>
+    <cs:effectRef idx="0"/>
+    <cs:fontRef idx="minor">
+      <a:schemeClr val="tx1"/>
+    </cs:fontRef>
+    <cs:spPr>
+      <a:ln w="19050" cap="rnd">
+        <a:solidFill>
+          <a:schemeClr val="phClr"/>
+        </a:solidFill>
+        <a:prstDash val="sysDot"/>
+      </a:ln>
+    </cs:spPr>
+  </cs:trendline>
+  <cs:trendlineLabel>
+    <cs:lnRef idx="0"/>
+    <cs:fillRef idx="0"/>
+    <cs:effectRef idx="0"/>
+    <cs:fontRef idx="minor">
+      <a:schemeClr val="tx1">
+        <a:lumMod val="65000"/>
+        <a:lumOff val="35000"/>
+      </a:schemeClr>
+    </cs:fontRef>
+    <cs:defRPr sz="1197" kern="1200"/>
+  </cs:trendlineLabel>
+  <cs:upBar>
+    <cs:lnRef idx="0"/>
+    <cs:fillRef idx="0"/>
+    <cs:effectRef idx="0"/>
+    <cs:fontRef idx="minor">
+      <a:schemeClr val="dk1"/>
+    </cs:fontRef>
+    <cs:spPr>
+      <a:solidFill>
+        <a:schemeClr val="lt1"/>
+      </a:solidFill>
+      <a:ln w="9525">
+        <a:solidFill>
+          <a:schemeClr val="tx1">
+            <a:lumMod val="15000"/>
+            <a:lumOff val="85000"/>
+          </a:schemeClr>
+        </a:solidFill>
+      </a:ln>
+    </cs:spPr>
+  </cs:upBar>
+  <cs:valueAxis>
+    <cs:lnRef idx="0"/>
+    <cs:fillRef idx="0"/>
+    <cs:effectRef idx="0"/>
+    <cs:fontRef idx="minor">
+      <a:schemeClr val="tx1">
+        <a:lumMod val="65000"/>
+        <a:lumOff val="35000"/>
+      </a:schemeClr>
+    </cs:fontRef>
+    <cs:defRPr sz="1197" kern="1200"/>
+  </cs:valueAxis>
+  <cs:wall>
+    <cs:lnRef idx="0"/>
+    <cs:fillRef idx="0"/>
+    <cs:effectRef idx="0"/>
+    <cs:fontRef idx="minor">
+      <a:schemeClr val="tx1"/>
+    </cs:fontRef>
+    <cs:spPr>
+      <a:noFill/>
+      <a:ln>
+        <a:noFill/>
+      </a:ln>
+    </cs:spPr>
+  </cs:wall>
+</cs:chartStyle>
+</file>
+
 <file path=ppt/notesMasters/notesMaster1.xml><?xml version="1.0" encoding="utf-8"?>
 <p:notesMaster xmlns:a="http://schemas.openxmlformats.org/drawingml/2006/main" xmlns:r="http://schemas.openxmlformats.org/officeDocument/2006/relationships" xmlns:p="http://schemas.openxmlformats.org/presentationml/2006/main">
   <p:cSld>
@@ -206,7 +2087,7 @@
           <a:p>
             <a:fld id="{71C0AB26-9112-414F-9F56-6834590D5BBC}" type="datetimeFigureOut">
               <a:rPr kumimoji="1" lang="ja-JP" altLang="en-US" smtClean="0"/>
-              <a:t>2026/9/17</a:t>
+              <a:t>2026/10/1</a:t>
             </a:fld>
             <a:endParaRPr kumimoji="1" lang="ja-JP" altLang="en-US"/>
           </a:p>
@@ -2916,6 +4797,680 @@
     <p:extLst>
       <p:ext uri="{BB962C8B-B14F-4D97-AF65-F5344CB8AC3E}">
         <p14:creationId xmlns:p14="http://schemas.microsoft.com/office/powerpoint/2010/main" val="3754369083"/>
+      </p:ext>
+    </p:extLst>
+  </p:cSld>
+  <p:clrMapOvr>
+    <a:masterClrMapping/>
+  </p:clrMapOvr>
+</p:sld>
+</file>
+
+<file path=ppt/slides/slide11.xml><?xml version="1.0" encoding="utf-8"?>
+<p:sld xmlns:a="http://schemas.openxmlformats.org/drawingml/2006/main" xmlns:r="http://schemas.openxmlformats.org/officeDocument/2006/relationships" xmlns:p="http://schemas.openxmlformats.org/presentationml/2006/main">
+  <p:cSld>
+    <p:spTree>
+      <p:nvGrpSpPr>
+        <p:cNvPr id="1" name="">
+          <a:extLst>
+            <a:ext uri="{FF2B5EF4-FFF2-40B4-BE49-F238E27FC236}">
+              <a16:creationId xmlns:a16="http://schemas.microsoft.com/office/drawing/2014/main" id="{F4BB6B46-4E82-94AC-CB74-085B9799730B}"/>
+            </a:ext>
+          </a:extLst>
+        </p:cNvPr>
+        <p:cNvGrpSpPr/>
+        <p:nvPr/>
+      </p:nvGrpSpPr>
+      <p:grpSpPr>
+        <a:xfrm>
+          <a:off x="0" y="0"/>
+          <a:ext cx="0" cy="0"/>
+          <a:chOff x="0" y="0"/>
+          <a:chExt cx="0" cy="0"/>
+        </a:xfrm>
+      </p:grpSpPr>
+      <p:sp>
+        <p:nvSpPr>
+          <p:cNvPr id="3" name="テキスト プレースホルダー 2">
+            <a:extLst>
+              <a:ext uri="{FF2B5EF4-FFF2-40B4-BE49-F238E27FC236}">
+                <a16:creationId xmlns:a16="http://schemas.microsoft.com/office/drawing/2014/main" id="{515474B1-1D14-296B-3A2E-FA1C3BD1595F}"/>
+              </a:ext>
+            </a:extLst>
+          </p:cNvPr>
+          <p:cNvSpPr>
+            <a:spLocks noGrp="1"/>
+          </p:cNvSpPr>
+          <p:nvPr>
+            <p:ph type="body" sz="quarter" idx="13"/>
+          </p:nvPr>
+        </p:nvSpPr>
+        <p:spPr>
+          <a:xfrm>
+            <a:off x="607992" y="732684"/>
+            <a:ext cx="756356" cy="395640"/>
+          </a:xfrm>
+        </p:spPr>
+        <p:txBody>
+          <a:bodyPr>
+            <a:noAutofit/>
+          </a:bodyPr>
+          <a:lstStyle/>
+          <a:p>
+            <a:r>
+              <a:rPr kumimoji="1" lang="en-US" altLang="ja-JP" dirty="0"/>
+              <a:t>00</a:t>
+            </a:r>
+            <a:endParaRPr kumimoji="1" lang="ja-JP" altLang="en-US"/>
+          </a:p>
+        </p:txBody>
+      </p:sp>
+      <p:sp>
+        <p:nvSpPr>
+          <p:cNvPr id="4" name="テキスト プレースホルダー 3">
+            <a:extLst>
+              <a:ext uri="{FF2B5EF4-FFF2-40B4-BE49-F238E27FC236}">
+                <a16:creationId xmlns:a16="http://schemas.microsoft.com/office/drawing/2014/main" id="{14CC6382-535C-F552-811A-7A4995FDD609}"/>
+              </a:ext>
+            </a:extLst>
+          </p:cNvPr>
+          <p:cNvSpPr>
+            <a:spLocks noGrp="1"/>
+          </p:cNvSpPr>
+          <p:nvPr>
+            <p:ph type="body" sz="quarter" idx="14"/>
+          </p:nvPr>
+        </p:nvSpPr>
+        <p:spPr>
+          <a:xfrm>
+            <a:off x="1443631" y="732684"/>
+            <a:ext cx="8605623" cy="395640"/>
+          </a:xfrm>
+        </p:spPr>
+        <p:txBody>
+          <a:bodyPr>
+            <a:noAutofit/>
+          </a:bodyPr>
+          <a:lstStyle/>
+          <a:p>
+            <a:r>
+              <a:rPr lang="ja-JP" altLang="ja-JP"/>
+              <a:t>[[章タイトル]]</a:t>
+            </a:r>
+            <a:endParaRPr kumimoji="1" lang="ja-JP" altLang="en-US"/>
+          </a:p>
+        </p:txBody>
+      </p:sp>
+      <p:sp>
+        <p:nvSpPr>
+          <p:cNvPr id="17" name="スライド番号プレースホルダー 16">
+            <a:extLst>
+              <a:ext uri="{FF2B5EF4-FFF2-40B4-BE49-F238E27FC236}">
+                <a16:creationId xmlns:a16="http://schemas.microsoft.com/office/drawing/2014/main" id="{B39BF9B7-3B8A-9570-4A00-73BC2EDB4FAC}"/>
+              </a:ext>
+            </a:extLst>
+          </p:cNvPr>
+          <p:cNvSpPr>
+            <a:spLocks noGrp="1"/>
+          </p:cNvSpPr>
+          <p:nvPr>
+            <p:ph type="sldNum" sz="quarter" idx="15"/>
+          </p:nvPr>
+        </p:nvSpPr>
+        <p:spPr/>
+        <p:txBody>
+          <a:bodyPr/>
+          <a:lstStyle/>
+          <a:p>
+            <a:fld id="{F902928F-94CC-A748-AE90-3A424BDEF7C8}" type="slidenum">
+              <a:rPr kumimoji="1" lang="ja-JP" altLang="en-US" smtClean="0"/>
+              <a:pPr/>
+              <a:t>10</a:t>
+            </a:fld>
+            <a:endParaRPr kumimoji="1" lang="ja-JP" altLang="en-US">
+              <a:solidFill>
+                <a:srgbClr val="02182E"/>
+              </a:solidFill>
+            </a:endParaRPr>
+          </a:p>
+        </p:txBody>
+      </p:sp>
+      <p:graphicFrame>
+        <p:nvGraphicFramePr>
+          <p:cNvPr id="14" name="グラフ 13">
+            <a:extLst>
+              <a:ext uri="{FF2B5EF4-FFF2-40B4-BE49-F238E27FC236}">
+                <a16:creationId xmlns:a16="http://schemas.microsoft.com/office/drawing/2014/main" id="{217E2247-E13F-962F-B69C-BE2E89771A91}"/>
+              </a:ext>
+            </a:extLst>
+          </p:cNvPr>
+          <p:cNvGraphicFramePr/>
+          <p:nvPr/>
+        </p:nvGraphicFramePr>
+        <p:xfrm>
+          <a:off x="6261554" y="1776360"/>
+          <a:ext cx="3507777" cy="2556305"/>
+        </p:xfrm>
+        <a:graphic>
+          <a:graphicData uri="http://schemas.openxmlformats.org/drawingml/2006/chart">
+            <c:chart xmlns:c="http://schemas.openxmlformats.org/drawingml/2006/chart" xmlns:r="http://schemas.openxmlformats.org/officeDocument/2006/relationships" r:id="rId2"/>
+          </a:graphicData>
+        </a:graphic>
+      </p:graphicFrame>
+      <p:sp>
+        <p:nvSpPr>
+          <p:cNvPr id="19" name="MAIN_SECTION_TITLE">
+            <a:extLst>
+              <a:ext uri="{FF2B5EF4-FFF2-40B4-BE49-F238E27FC236}">
+                <a16:creationId xmlns:a16="http://schemas.microsoft.com/office/drawing/2014/main" id="{563E38BA-03A3-3E26-911A-28F46FBDF1FC}"/>
+              </a:ext>
+            </a:extLst>
+          </p:cNvPr>
+          <p:cNvSpPr txBox="1"/>
+          <p:nvPr/>
+        </p:nvSpPr>
+        <p:spPr>
+          <a:xfrm>
+            <a:off x="1582052" y="1497330"/>
+            <a:ext cx="4502225" cy="338554"/>
+          </a:xfrm>
+          <a:prstGeom prst="rect">
+            <a:avLst/>
+          </a:prstGeom>
+          <a:noFill/>
+        </p:spPr>
+        <p:txBody>
+          <a:bodyPr wrap="square" rtlCol="0">
+            <a:spAutoFit/>
+          </a:bodyPr>
+          <a:lstStyle/>
+          <a:p>
+            <a:r>
+              <a:rPr lang="ja-JP" altLang="ja-JP" sz="1600" b="1">
+                <a:solidFill>
+                  <a:srgbClr val="02182E"/>
+                </a:solidFill>
+                <a:latin typeface="Meiryo" panose="020B0604030504040204" pitchFamily="34" charset="-128"/>
+                <a:ea typeface="Meiryo" panose="020B0604030504040204" pitchFamily="34" charset="-128"/>
+              </a:rPr>
+              <a:t>[[主要項目]]</a:t>
+            </a:r>
+            <a:endParaRPr kumimoji="1" lang="ja-JP" altLang="en-US" sz="1600" b="1">
+              <a:solidFill>
+                <a:srgbClr val="02182E"/>
+              </a:solidFill>
+              <a:latin typeface="Meiryo" panose="020B0604030504040204" pitchFamily="34" charset="-128"/>
+              <a:ea typeface="Meiryo" panose="020B0604030504040204" pitchFamily="34" charset="-128"/>
+            </a:endParaRPr>
+          </a:p>
+        </p:txBody>
+      </p:sp>
+      <p:sp>
+        <p:nvSpPr>
+          <p:cNvPr id="20" name="SECTION_LINE">
+            <a:extLst>
+              <a:ext uri="{FF2B5EF4-FFF2-40B4-BE49-F238E27FC236}">
+                <a16:creationId xmlns:a16="http://schemas.microsoft.com/office/drawing/2014/main" id="{D3783AC1-192C-45EC-78EF-B88D2A41C5A2}"/>
+              </a:ext>
+            </a:extLst>
+          </p:cNvPr>
+          <p:cNvSpPr/>
+          <p:nvPr/>
+        </p:nvSpPr>
+        <p:spPr>
+          <a:xfrm>
+            <a:off x="1443632" y="1531560"/>
+            <a:ext cx="45719" cy="244800"/>
+          </a:xfrm>
+          <a:prstGeom prst="rect">
+            <a:avLst/>
+          </a:prstGeom>
+          <a:solidFill>
+            <a:srgbClr val="D7000F"/>
+          </a:solidFill>
+          <a:ln>
+            <a:noFill/>
+          </a:ln>
+        </p:spPr>
+        <p:style>
+          <a:lnRef idx="2">
+            <a:schemeClr val="accent1">
+              <a:shade val="15000"/>
+            </a:schemeClr>
+          </a:lnRef>
+          <a:fillRef idx="1">
+            <a:schemeClr val="accent1"/>
+          </a:fillRef>
+          <a:effectRef idx="0">
+            <a:schemeClr val="accent1"/>
+          </a:effectRef>
+          <a:fontRef idx="minor">
+            <a:schemeClr val="lt1"/>
+          </a:fontRef>
+        </p:style>
+        <p:txBody>
+          <a:bodyPr rtlCol="0" anchor="ctr"/>
+          <a:lstStyle/>
+          <a:p>
+            <a:pPr algn="ctr"/>
+            <a:endParaRPr kumimoji="1" lang="ja-JP" altLang="en-US"/>
+          </a:p>
+        </p:txBody>
+      </p:sp>
+      <p:sp>
+        <p:nvSpPr>
+          <p:cNvPr id="21" name="MAIN_BODY_TEXT">
+            <a:extLst>
+              <a:ext uri="{FF2B5EF4-FFF2-40B4-BE49-F238E27FC236}">
+                <a16:creationId xmlns:a16="http://schemas.microsoft.com/office/drawing/2014/main" id="{337E9BD3-983F-C8DC-EB0F-EA063B132FFF}"/>
+              </a:ext>
+            </a:extLst>
+          </p:cNvPr>
+          <p:cNvSpPr txBox="1"/>
+          <p:nvPr/>
+        </p:nvSpPr>
+        <p:spPr>
+          <a:xfrm>
+            <a:off x="1443632" y="1879294"/>
+            <a:ext cx="4640645" cy="303929"/>
+          </a:xfrm>
+          <a:prstGeom prst="rect">
+            <a:avLst/>
+          </a:prstGeom>
+          <a:noFill/>
+        </p:spPr>
+        <p:txBody>
+          <a:bodyPr wrap="square" rtlCol="0">
+            <a:spAutoFit/>
+          </a:bodyPr>
+          <a:lstStyle/>
+          <a:p>
+            <a:pPr>
+              <a:lnSpc>
+                <a:spcPts val="1800"/>
+              </a:lnSpc>
+            </a:pPr>
+            <a:r>
+              <a:rPr lang="ja-JP" altLang="ja-JP" sz="1000">
+                <a:solidFill>
+                  <a:srgbClr val="02182E"/>
+                </a:solidFill>
+                <a:latin typeface="Meiryo" panose="020B0604030504040204" pitchFamily="34" charset="-128"/>
+                <a:ea typeface="Meiryo" panose="020B0604030504040204" pitchFamily="34" charset="-128"/>
+              </a:rPr>
+              <a:t>[[</a:t>
+            </a:r>
+            <a:r>
+              <a:rPr lang="ja-JP" altLang="en-US" sz="1000">
+                <a:solidFill>
+                  <a:srgbClr val="02182E"/>
+                </a:solidFill>
+                <a:latin typeface="Meiryo" panose="020B0604030504040204" pitchFamily="34" charset="-128"/>
+                <a:ea typeface="Meiryo" panose="020B0604030504040204" pitchFamily="34" charset="-128"/>
+              </a:rPr>
+              <a:t>本文</a:t>
+            </a:r>
+            <a:r>
+              <a:rPr lang="ja-JP" altLang="ja-JP" sz="1000">
+                <a:solidFill>
+                  <a:srgbClr val="02182E"/>
+                </a:solidFill>
+                <a:latin typeface="Meiryo" panose="020B0604030504040204" pitchFamily="34" charset="-128"/>
+                <a:ea typeface="Meiryo" panose="020B0604030504040204" pitchFamily="34" charset="-128"/>
+              </a:rPr>
+              <a:t>]]</a:t>
+            </a:r>
+            <a:endParaRPr lang="en-US" altLang="ja-JP" sz="1000" dirty="0">
+              <a:solidFill>
+                <a:srgbClr val="02182E"/>
+              </a:solidFill>
+              <a:latin typeface="Meiryo" panose="020B0604030504040204" pitchFamily="34" charset="-128"/>
+              <a:ea typeface="Meiryo" panose="020B0604030504040204" pitchFamily="34" charset="-128"/>
+            </a:endParaRPr>
+          </a:p>
+        </p:txBody>
+      </p:sp>
+    </p:spTree>
+    <p:extLst>
+      <p:ext uri="{BB962C8B-B14F-4D97-AF65-F5344CB8AC3E}">
+        <p14:creationId xmlns:p14="http://schemas.microsoft.com/office/powerpoint/2010/main" val="2996117355"/>
+      </p:ext>
+    </p:extLst>
+  </p:cSld>
+  <p:clrMapOvr>
+    <a:masterClrMapping/>
+  </p:clrMapOvr>
+</p:sld>
+</file>
+
+<file path=ppt/slides/slide12.xml><?xml version="1.0" encoding="utf-8"?>
+<p:sld xmlns:a="http://schemas.openxmlformats.org/drawingml/2006/main" xmlns:r="http://schemas.openxmlformats.org/officeDocument/2006/relationships" xmlns:p="http://schemas.openxmlformats.org/presentationml/2006/main">
+  <p:cSld>
+    <p:spTree>
+      <p:nvGrpSpPr>
+        <p:cNvPr id="1" name="">
+          <a:extLst>
+            <a:ext uri="{FF2B5EF4-FFF2-40B4-BE49-F238E27FC236}">
+              <a16:creationId xmlns:a16="http://schemas.microsoft.com/office/drawing/2014/main" id="{BCF9F256-0F6B-4551-5E10-E5A777179B8C}"/>
+            </a:ext>
+          </a:extLst>
+        </p:cNvPr>
+        <p:cNvGrpSpPr/>
+        <p:nvPr/>
+      </p:nvGrpSpPr>
+      <p:grpSpPr>
+        <a:xfrm>
+          <a:off x="0" y="0"/>
+          <a:ext cx="0" cy="0"/>
+          <a:chOff x="0" y="0"/>
+          <a:chExt cx="0" cy="0"/>
+        </a:xfrm>
+      </p:grpSpPr>
+      <p:sp>
+        <p:nvSpPr>
+          <p:cNvPr id="3" name="テキスト プレースホルダー 2">
+            <a:extLst>
+              <a:ext uri="{FF2B5EF4-FFF2-40B4-BE49-F238E27FC236}">
+                <a16:creationId xmlns:a16="http://schemas.microsoft.com/office/drawing/2014/main" id="{70F63DF7-A2A6-F9AB-FB35-948FCAA72A34}"/>
+              </a:ext>
+            </a:extLst>
+          </p:cNvPr>
+          <p:cNvSpPr>
+            <a:spLocks noGrp="1"/>
+          </p:cNvSpPr>
+          <p:nvPr>
+            <p:ph type="body" sz="quarter" idx="13"/>
+          </p:nvPr>
+        </p:nvSpPr>
+        <p:spPr>
+          <a:xfrm>
+            <a:off x="607992" y="732684"/>
+            <a:ext cx="756356" cy="395640"/>
+          </a:xfrm>
+        </p:spPr>
+        <p:txBody>
+          <a:bodyPr>
+            <a:noAutofit/>
+          </a:bodyPr>
+          <a:lstStyle/>
+          <a:p>
+            <a:r>
+              <a:rPr kumimoji="1" lang="en-US" altLang="ja-JP" dirty="0"/>
+              <a:t>00</a:t>
+            </a:r>
+            <a:endParaRPr kumimoji="1" lang="ja-JP" altLang="en-US"/>
+          </a:p>
+        </p:txBody>
+      </p:sp>
+      <p:sp>
+        <p:nvSpPr>
+          <p:cNvPr id="4" name="テキスト プレースホルダー 3">
+            <a:extLst>
+              <a:ext uri="{FF2B5EF4-FFF2-40B4-BE49-F238E27FC236}">
+                <a16:creationId xmlns:a16="http://schemas.microsoft.com/office/drawing/2014/main" id="{5598970B-32A6-7B7E-A06D-5B1499C571F6}"/>
+              </a:ext>
+            </a:extLst>
+          </p:cNvPr>
+          <p:cNvSpPr>
+            <a:spLocks noGrp="1"/>
+          </p:cNvSpPr>
+          <p:nvPr>
+            <p:ph type="body" sz="quarter" idx="14"/>
+          </p:nvPr>
+        </p:nvSpPr>
+        <p:spPr>
+          <a:xfrm>
+            <a:off x="1443631" y="732684"/>
+            <a:ext cx="8605623" cy="395640"/>
+          </a:xfrm>
+        </p:spPr>
+        <p:txBody>
+          <a:bodyPr>
+            <a:noAutofit/>
+          </a:bodyPr>
+          <a:lstStyle/>
+          <a:p>
+            <a:r>
+              <a:rPr lang="ja-JP" altLang="ja-JP"/>
+              <a:t>[[章タイトル]]</a:t>
+            </a:r>
+            <a:endParaRPr kumimoji="1" lang="ja-JP" altLang="en-US"/>
+          </a:p>
+        </p:txBody>
+      </p:sp>
+      <p:sp>
+        <p:nvSpPr>
+          <p:cNvPr id="17" name="スライド番号プレースホルダー 16">
+            <a:extLst>
+              <a:ext uri="{FF2B5EF4-FFF2-40B4-BE49-F238E27FC236}">
+                <a16:creationId xmlns:a16="http://schemas.microsoft.com/office/drawing/2014/main" id="{14EA3491-4F9D-D7A7-2F68-230A203B9171}"/>
+              </a:ext>
+            </a:extLst>
+          </p:cNvPr>
+          <p:cNvSpPr>
+            <a:spLocks noGrp="1"/>
+          </p:cNvSpPr>
+          <p:nvPr>
+            <p:ph type="sldNum" sz="quarter" idx="15"/>
+          </p:nvPr>
+        </p:nvSpPr>
+        <p:spPr/>
+        <p:txBody>
+          <a:bodyPr/>
+          <a:lstStyle/>
+          <a:p>
+            <a:fld id="{F902928F-94CC-A748-AE90-3A424BDEF7C8}" type="slidenum">
+              <a:rPr kumimoji="1" lang="ja-JP" altLang="en-US" smtClean="0"/>
+              <a:pPr/>
+              <a:t>11</a:t>
+            </a:fld>
+            <a:endParaRPr kumimoji="1" lang="ja-JP" altLang="en-US">
+              <a:solidFill>
+                <a:srgbClr val="02182E"/>
+              </a:solidFill>
+            </a:endParaRPr>
+          </a:p>
+        </p:txBody>
+      </p:sp>
+      <p:graphicFrame>
+        <p:nvGraphicFramePr>
+          <p:cNvPr id="14" name="グラフ 13">
+            <a:extLst>
+              <a:ext uri="{FF2B5EF4-FFF2-40B4-BE49-F238E27FC236}">
+                <a16:creationId xmlns:a16="http://schemas.microsoft.com/office/drawing/2014/main" id="{6977B478-6CD5-E809-9E2C-C8EBF9F813B3}"/>
+              </a:ext>
+            </a:extLst>
+          </p:cNvPr>
+          <p:cNvGraphicFramePr/>
+          <p:nvPr/>
+        </p:nvGraphicFramePr>
+        <p:xfrm>
+          <a:off x="6261554" y="1776360"/>
+          <a:ext cx="3507777" cy="2556305"/>
+        </p:xfrm>
+        <a:graphic>
+          <a:graphicData uri="http://schemas.openxmlformats.org/drawingml/2006/chart">
+            <c:chart xmlns:c="http://schemas.openxmlformats.org/drawingml/2006/chart" xmlns:r="http://schemas.openxmlformats.org/officeDocument/2006/relationships" r:id="rId2"/>
+          </a:graphicData>
+        </a:graphic>
+      </p:graphicFrame>
+      <p:sp>
+        <p:nvSpPr>
+          <p:cNvPr id="19" name="MAIN_SECTION_TITLE">
+            <a:extLst>
+              <a:ext uri="{FF2B5EF4-FFF2-40B4-BE49-F238E27FC236}">
+                <a16:creationId xmlns:a16="http://schemas.microsoft.com/office/drawing/2014/main" id="{DA11690B-D7E3-2215-95CF-02B2C0DA4AC0}"/>
+              </a:ext>
+            </a:extLst>
+          </p:cNvPr>
+          <p:cNvSpPr txBox="1"/>
+          <p:nvPr/>
+        </p:nvSpPr>
+        <p:spPr>
+          <a:xfrm>
+            <a:off x="1582052" y="1497330"/>
+            <a:ext cx="4502225" cy="338554"/>
+          </a:xfrm>
+          <a:prstGeom prst="rect">
+            <a:avLst/>
+          </a:prstGeom>
+          <a:noFill/>
+        </p:spPr>
+        <p:txBody>
+          <a:bodyPr wrap="square" rtlCol="0">
+            <a:spAutoFit/>
+          </a:bodyPr>
+          <a:lstStyle/>
+          <a:p>
+            <a:r>
+              <a:rPr lang="ja-JP" altLang="ja-JP" sz="1600" b="1">
+                <a:solidFill>
+                  <a:srgbClr val="02182E"/>
+                </a:solidFill>
+                <a:latin typeface="Meiryo" panose="020B0604030504040204" pitchFamily="34" charset="-128"/>
+                <a:ea typeface="Meiryo" panose="020B0604030504040204" pitchFamily="34" charset="-128"/>
+              </a:rPr>
+              <a:t>[[主要項目]]</a:t>
+            </a:r>
+            <a:endParaRPr kumimoji="1" lang="ja-JP" altLang="en-US" sz="1600" b="1">
+              <a:solidFill>
+                <a:srgbClr val="02182E"/>
+              </a:solidFill>
+              <a:latin typeface="Meiryo" panose="020B0604030504040204" pitchFamily="34" charset="-128"/>
+              <a:ea typeface="Meiryo" panose="020B0604030504040204" pitchFamily="34" charset="-128"/>
+            </a:endParaRPr>
+          </a:p>
+        </p:txBody>
+      </p:sp>
+      <p:sp>
+        <p:nvSpPr>
+          <p:cNvPr id="20" name="SECTION_LINE">
+            <a:extLst>
+              <a:ext uri="{FF2B5EF4-FFF2-40B4-BE49-F238E27FC236}">
+                <a16:creationId xmlns:a16="http://schemas.microsoft.com/office/drawing/2014/main" id="{4865BE49-519A-4D90-2C7F-7B198E06C72E}"/>
+              </a:ext>
+            </a:extLst>
+          </p:cNvPr>
+          <p:cNvSpPr/>
+          <p:nvPr/>
+        </p:nvSpPr>
+        <p:spPr>
+          <a:xfrm>
+            <a:off x="1443632" y="1531560"/>
+            <a:ext cx="45719" cy="244800"/>
+          </a:xfrm>
+          <a:prstGeom prst="rect">
+            <a:avLst/>
+          </a:prstGeom>
+          <a:solidFill>
+            <a:srgbClr val="D7000F"/>
+          </a:solidFill>
+          <a:ln>
+            <a:noFill/>
+          </a:ln>
+        </p:spPr>
+        <p:style>
+          <a:lnRef idx="2">
+            <a:schemeClr val="accent1">
+              <a:shade val="15000"/>
+            </a:schemeClr>
+          </a:lnRef>
+          <a:fillRef idx="1">
+            <a:schemeClr val="accent1"/>
+          </a:fillRef>
+          <a:effectRef idx="0">
+            <a:schemeClr val="accent1"/>
+          </a:effectRef>
+          <a:fontRef idx="minor">
+            <a:schemeClr val="lt1"/>
+          </a:fontRef>
+        </p:style>
+        <p:txBody>
+          <a:bodyPr rtlCol="0" anchor="ctr"/>
+          <a:lstStyle/>
+          <a:p>
+            <a:pPr algn="ctr"/>
+            <a:endParaRPr kumimoji="1" lang="ja-JP" altLang="en-US"/>
+          </a:p>
+        </p:txBody>
+      </p:sp>
+      <p:sp>
+        <p:nvSpPr>
+          <p:cNvPr id="21" name="MAIN_BODY_TEXT">
+            <a:extLst>
+              <a:ext uri="{FF2B5EF4-FFF2-40B4-BE49-F238E27FC236}">
+                <a16:creationId xmlns:a16="http://schemas.microsoft.com/office/drawing/2014/main" id="{738A51B3-1B8A-061B-096E-558C8F9C558A}"/>
+              </a:ext>
+            </a:extLst>
+          </p:cNvPr>
+          <p:cNvSpPr txBox="1"/>
+          <p:nvPr/>
+        </p:nvSpPr>
+        <p:spPr>
+          <a:xfrm>
+            <a:off x="1443632" y="1879294"/>
+            <a:ext cx="4640645" cy="303929"/>
+          </a:xfrm>
+          <a:prstGeom prst="rect">
+            <a:avLst/>
+          </a:prstGeom>
+          <a:noFill/>
+        </p:spPr>
+        <p:txBody>
+          <a:bodyPr wrap="square" rtlCol="0">
+            <a:spAutoFit/>
+          </a:bodyPr>
+          <a:lstStyle/>
+          <a:p>
+            <a:pPr>
+              <a:lnSpc>
+                <a:spcPts val="1800"/>
+              </a:lnSpc>
+            </a:pPr>
+            <a:r>
+              <a:rPr lang="ja-JP" altLang="ja-JP" sz="1000">
+                <a:solidFill>
+                  <a:srgbClr val="02182E"/>
+                </a:solidFill>
+                <a:latin typeface="Meiryo" panose="020B0604030504040204" pitchFamily="34" charset="-128"/>
+                <a:ea typeface="Meiryo" panose="020B0604030504040204" pitchFamily="34" charset="-128"/>
+              </a:rPr>
+              <a:t>[[</a:t>
+            </a:r>
+            <a:r>
+              <a:rPr lang="ja-JP" altLang="en-US" sz="1000">
+                <a:solidFill>
+                  <a:srgbClr val="02182E"/>
+                </a:solidFill>
+                <a:latin typeface="Meiryo" panose="020B0604030504040204" pitchFamily="34" charset="-128"/>
+                <a:ea typeface="Meiryo" panose="020B0604030504040204" pitchFamily="34" charset="-128"/>
+              </a:rPr>
+              <a:t>本文</a:t>
+            </a:r>
+            <a:r>
+              <a:rPr lang="ja-JP" altLang="ja-JP" sz="1000">
+                <a:solidFill>
+                  <a:srgbClr val="02182E"/>
+                </a:solidFill>
+                <a:latin typeface="Meiryo" panose="020B0604030504040204" pitchFamily="34" charset="-128"/>
+                <a:ea typeface="Meiryo" panose="020B0604030504040204" pitchFamily="34" charset="-128"/>
+              </a:rPr>
+              <a:t>]]</a:t>
+            </a:r>
+            <a:endParaRPr lang="en-US" altLang="ja-JP" sz="1000" dirty="0">
+              <a:solidFill>
+                <a:srgbClr val="02182E"/>
+              </a:solidFill>
+              <a:latin typeface="Meiryo" panose="020B0604030504040204" pitchFamily="34" charset="-128"/>
+              <a:ea typeface="Meiryo" panose="020B0604030504040204" pitchFamily="34" charset="-128"/>
+            </a:endParaRPr>
+          </a:p>
+        </p:txBody>
+      </p:sp>
+    </p:spTree>
+    <p:extLst>
+      <p:ext uri="{BB962C8B-B14F-4D97-AF65-F5344CB8AC3E}">
+        <p14:creationId xmlns:p14="http://schemas.microsoft.com/office/powerpoint/2010/main" val="2541403960"/>
       </p:ext>
     </p:extLst>
   </p:cSld>

--- a/資料作成テンプレート_A4横.pptx
+++ b/資料作成テンプレート_A4横.pptx
@@ -198,7 +198,7 @@
               <a:cs typeface="+mn-cs"/>
             </a:defRPr>
           </a:pPr>
-          <a:endParaRPr lang="ja-JP"/>
+          <a:endParaRPr lang="en-US" altLang="ja-JP"/>
         </a:p>
       </c:txPr>
     </c:title>
@@ -398,15 +398,15 @@
           <a:lstStyle/>
           <a:p>
             <a:pPr>
-              <a:defRPr sz="1197" b="0" i="0" u="none" strike="noStrike" kern="1200" baseline="0">
+              <a:defRPr sz="800" b="0" i="0" u="none" strike="noStrike" kern="1200" baseline="0">
                 <a:solidFill>
                   <a:schemeClr val="tx1">
                     <a:lumMod val="65000"/>
                     <a:lumOff val="35000"/>
                   </a:schemeClr>
                 </a:solidFill>
-                <a:latin typeface="+mn-lt"/>
-                <a:ea typeface="+mn-ea"/>
+                <a:latin typeface="Meiryo" panose="020B0604030504040204" pitchFamily="34" charset="-128"/>
+                <a:ea typeface="Meiryo" panose="020B0604030504040204" pitchFamily="34" charset="-128"/>
                 <a:cs typeface="+mn-cs"/>
               </a:defRPr>
             </a:pPr>
@@ -799,15 +799,15 @@
           <a:lstStyle/>
           <a:p>
             <a:pPr>
-              <a:defRPr sz="1197" b="0" i="0" u="none" strike="noStrike" kern="1200" baseline="0">
+              <a:defRPr sz="800" b="0" i="0" u="none" strike="noStrike" kern="1200" baseline="0">
                 <a:solidFill>
                   <a:schemeClr val="tx1">
                     <a:lumMod val="65000"/>
                     <a:lumOff val="35000"/>
                   </a:schemeClr>
                 </a:solidFill>
-                <a:latin typeface="+mn-lt"/>
-                <a:ea typeface="+mn-ea"/>
+                <a:latin typeface="Meiryo" panose="020B0604030504040204" pitchFamily="34" charset="-128"/>
+                <a:ea typeface="Meiryo" panose="020B0604030504040204" pitchFamily="34" charset="-128"/>
                 <a:cs typeface="+mn-cs"/>
               </a:defRPr>
             </a:pPr>
@@ -4945,7 +4945,13 @@
             </a:extLst>
           </p:cNvPr>
           <p:cNvGraphicFramePr/>
-          <p:nvPr/>
+          <p:nvPr>
+            <p:extLst>
+              <p:ext uri="{D42A27DB-BD31-4B8C-83A1-F6EECF244321}">
+                <p14:modId xmlns:p14="http://schemas.microsoft.com/office/powerpoint/2010/main" val="3388309792"/>
+              </p:ext>
+            </p:extLst>
+          </p:nvPr>
         </p:nvGraphicFramePr>
         <p:xfrm>
           <a:off x="6261554" y="1776360"/>
@@ -5282,7 +5288,13 @@
             </a:extLst>
           </p:cNvPr>
           <p:cNvGraphicFramePr/>
-          <p:nvPr/>
+          <p:nvPr>
+            <p:extLst>
+              <p:ext uri="{D42A27DB-BD31-4B8C-83A1-F6EECF244321}">
+                <p14:modId xmlns:p14="http://schemas.microsoft.com/office/powerpoint/2010/main" val="1796088546"/>
+              </p:ext>
+            </p:extLst>
+          </p:nvPr>
         </p:nvGraphicFramePr>
         <p:xfrm>
           <a:off x="6261554" y="1776360"/>
